--- a/docs/presentation/PSV-Dashboard-Overview.pptx
+++ b/docs/presentation/PSV-Dashboard-Overview.pptx
@@ -18,6 +18,19 @@
     <p:sldId id="266" r:id="rId17"/>
     <p:sldId id="267" r:id="rId18"/>
     <p:sldId id="268" r:id="rId19"/>
+    <p:sldId id="269" r:id="rId20"/>
+    <p:sldId id="270" r:id="rId21"/>
+    <p:sldId id="271" r:id="rId22"/>
+    <p:sldId id="272" r:id="rId23"/>
+    <p:sldId id="273" r:id="rId24"/>
+    <p:sldId id="274" r:id="rId25"/>
+    <p:sldId id="275" r:id="rId26"/>
+    <p:sldId id="276" r:id="rId27"/>
+    <p:sldId id="277" r:id="rId28"/>
+    <p:sldId id="278" r:id="rId29"/>
+    <p:sldId id="279" r:id="rId30"/>
+    <p:sldId id="280" r:id="rId31"/>
+    <p:sldId id="281" r:id="rId32"/>
   </p:sldIdLst>
   <p:sldSz cx="12191695" cy="6858000" type="screen4x3"/>
   <p:notesSz cx="6858000" cy="9144000"/>
@@ -3124,7 +3137,7 @@
         </p:blipFill>
         <p:spPr>
           <a:xfrm>
-            <a:off x="5623560" y="822960"/>
+            <a:off x="5623560" y="685800"/>
             <a:ext cx="914400" cy="914400"/>
           </a:xfrm>
           <a:prstGeom prst="rect">
@@ -3140,8 +3153,8 @@
         </p:nvSpPr>
         <p:spPr>
           <a:xfrm>
-            <a:off x="731520" y="1828800"/>
-            <a:ext cx="10515600" cy="1097280"/>
+            <a:off x="640080" y="1691640"/>
+            <a:ext cx="10881360" cy="1280160"/>
           </a:xfrm>
           <a:prstGeom prst="rect">
             <a:avLst/>
@@ -3155,14 +3168,14 @@
           <a:lstStyle/>
           <a:p>
             <a:pPr algn="ctr">
-              <a:defRPr sz="3800" b="1">
+              <a:defRPr sz="4000" b="1">
                 <a:solidFill>
                   <a:srgbClr val="FFFFFF"/>
                 </a:solidFill>
               </a:defRPr>
             </a:pPr>
             <a:r>
-              <a:t>PSV Compliance Tracking Dashboard</a:t>
+              <a:t>Steam Safety Management Program</a:t>
             </a:r>
           </a:p>
         </p:txBody>
@@ -3175,8 +3188,8 @@
         </p:nvSpPr>
         <p:spPr>
           <a:xfrm>
-            <a:off x="731520" y="2926080"/>
-            <a:ext cx="10515600" cy="731520"/>
+            <a:off x="640080" y="2926080"/>
+            <a:ext cx="10881360" cy="822960"/>
           </a:xfrm>
           <a:prstGeom prst="rect">
             <a:avLst/>
@@ -3190,14 +3203,14 @@
           <a:lstStyle/>
           <a:p>
             <a:pPr algn="ctr">
-              <a:defRPr sz="2200">
+              <a:defRPr sz="2000">
                 <a:solidFill>
                   <a:srgbClr val="FCE7E7"/>
                 </a:solidFill>
               </a:defRPr>
             </a:pPr>
             <a:r>
-              <a:t>Texas A&amp;M University · Utilities &amp; Energy Services</a:t>
+              <a:t>Pressure Safety Valve (PSV) Compliance · Data · Maintenance Strategy</a:t>
             </a:r>
           </a:p>
         </p:txBody>
@@ -3210,8 +3223,8 @@
         </p:nvSpPr>
         <p:spPr>
           <a:xfrm>
-            <a:off x="731520" y="3840480"/>
-            <a:ext cx="10515600" cy="548640"/>
+            <a:off x="640080" y="3749039"/>
+            <a:ext cx="10881360" cy="548640"/>
           </a:xfrm>
           <a:prstGeom prst="rect">
             <a:avLst/>
@@ -3225,14 +3238,14 @@
           <a:lstStyle/>
           <a:p>
             <a:pPr algn="ctr">
-              <a:defRPr sz="1400">
+              <a:defRPr sz="1800">
                 <a:solidFill>
                   <a:srgbClr val="E8C4C4"/>
                 </a:solidFill>
               </a:defRPr>
             </a:pPr>
             <a:r>
-              <a:t>Reliability &amp; Compliance · Pressure Safety Valve Program</a:t>
+              <a:t>Texas A&amp;M University · Utilities &amp; Energy Services</a:t>
             </a:r>
           </a:p>
         </p:txBody>
@@ -3245,8 +3258,8 @@
         </p:nvSpPr>
         <p:spPr>
           <a:xfrm>
-            <a:off x="731520" y="5669280"/>
-            <a:ext cx="10515600" cy="457200"/>
+            <a:off x="640080" y="5029200"/>
+            <a:ext cx="10881360" cy="457200"/>
           </a:xfrm>
           <a:prstGeom prst="rect">
             <a:avLst/>
@@ -3260,14 +3273,14 @@
           <a:lstStyle/>
           <a:p>
             <a:pPr algn="ctr">
-              <a:defRPr sz="1300">
-                <a:solidFill>
-                  <a:srgbClr val="FCE7E7"/>
-                </a:solidFill>
-              </a:defRPr>
-            </a:pPr>
-            <a:r>
-              <a:t>reliability-and-compliance-dashboar.vercel.app</a:t>
+              <a:defRPr sz="1400">
+                <a:solidFill>
+                  <a:srgbClr val="94A3B8"/>
+                </a:solidFill>
+              </a:defRPr>
+            </a:pPr>
+            <a:r>
+              <a:t>Leadership Briefing · Reliability &amp; Compliance</a:t>
             </a:r>
           </a:p>
         </p:txBody>
@@ -3286,7 +3299,7 @@
     <p:bg>
       <p:bgPr>
         <a:solidFill>
-          <a:srgbClr val="FFFFFF"/>
+          <a:srgbClr val="500000"/>
         </a:solidFill>
         <a:effectLst/>
       </p:bgPr>
@@ -3306,8 +3319,8 @@
         </p:nvSpPr>
         <p:spPr>
           <a:xfrm>
-            <a:off x="640080" y="365760"/>
-            <a:ext cx="10972800" cy="640080"/>
+            <a:off x="822960" y="2560320"/>
+            <a:ext cx="10515600" cy="1097280"/>
           </a:xfrm>
           <a:prstGeom prst="rect">
             <a:avLst/>
@@ -3320,72 +3333,29 @@
           </a:bodyPr>
           <a:lstStyle/>
           <a:p>
-            <a:pPr>
-              <a:defRPr sz="2600" b="1">
-                <a:solidFill>
-                  <a:srgbClr val="500000"/>
-                </a:solidFill>
-              </a:defRPr>
-            </a:pPr>
-            <a:r>
-              <a:t>Excel Reporting</a:t>
-            </a:r>
-          </a:p>
-        </p:txBody>
-      </p:sp>
-      <p:sp>
-        <p:nvSpPr>
-          <p:cNvPr id="3" name="Rectangle 2"/>
-          <p:cNvSpPr/>
-          <p:nvPr/>
-        </p:nvSpPr>
-        <p:spPr>
-          <a:xfrm>
-            <a:off x="640080" y="960120"/>
-            <a:ext cx="10881360" cy="27432"/>
-          </a:xfrm>
-          <a:prstGeom prst="rect">
-            <a:avLst/>
-          </a:prstGeom>
-          <a:solidFill>
-            <a:srgbClr val="B83A3A"/>
-          </a:solidFill>
-          <a:ln>
-            <a:noFill/>
-          </a:ln>
-        </p:spPr>
-        <p:style>
-          <a:lnRef idx="1">
-            <a:schemeClr val="accent1"/>
-          </a:lnRef>
-          <a:fillRef idx="3">
-            <a:schemeClr val="accent1"/>
-          </a:fillRef>
-          <a:effectRef idx="2">
-            <a:schemeClr val="accent1"/>
-          </a:effectRef>
-          <a:fontRef idx="minor">
-            <a:schemeClr val="lt1"/>
-          </a:fontRef>
-        </p:style>
-        <p:txBody>
-          <a:bodyPr rtlCol="0" anchor="ctr"/>
-          <a:lstStyle/>
-          <a:p>
-            <a:pPr algn="ctr"/>
-          </a:p>
-        </p:txBody>
-      </p:sp>
-      <p:sp>
-        <p:nvSpPr>
-          <p:cNvPr id="4" name="TextBox 3"/>
+            <a:pPr algn="ctr">
+              <a:defRPr sz="3600" b="1">
+                <a:solidFill>
+                  <a:srgbClr val="FFFFFF"/>
+                </a:solidFill>
+              </a:defRPr>
+            </a:pPr>
+            <a:r>
+              <a:t>Phase 3 — Digital Compliance Dashboard</a:t>
+            </a:r>
+          </a:p>
+        </p:txBody>
+      </p:sp>
+      <p:sp>
+        <p:nvSpPr>
+          <p:cNvPr id="3" name="TextBox 2"/>
           <p:cNvSpPr txBox="1"/>
           <p:nvPr/>
         </p:nvSpPr>
         <p:spPr>
           <a:xfrm>
-            <a:off x="822960" y="1188720"/>
-            <a:ext cx="10789920" cy="5212080"/>
+            <a:off x="822960" y="3566160"/>
+            <a:ext cx="10515600" cy="914400"/>
           </a:xfrm>
           <a:prstGeom prst="rect">
             <a:avLst/>
@@ -3393,68 +3363,20 @@
           <a:noFill/>
         </p:spPr>
         <p:txBody>
-          <a:bodyPr wrap="square">
+          <a:bodyPr wrap="none">
             <a:spAutoFit/>
           </a:bodyPr>
           <a:lstStyle/>
           <a:p>
-            <a:pPr>
-              <a:spcAft>
-                <a:spcPts val="1000"/>
-              </a:spcAft>
+            <a:pPr algn="ctr">
               <a:defRPr sz="1800">
                 <a:solidFill>
-                  <a:srgbClr val="1E293B"/>
-                </a:solidFill>
-              </a:defRPr>
-            </a:pPr>
-            <a:r>
-              <a:t>Download Excel Report → PSV-Full-Report-*.xlsx (5 sheets)</a:t>
-            </a:r>
-          </a:p>
-          <a:p>
-            <a:pPr>
-              <a:spcAft>
-                <a:spcPts val="1000"/>
-              </a:spcAft>
-              <a:defRPr sz="1800">
-                <a:solidFill>
-                  <a:srgbClr val="1E293B"/>
-                </a:solidFill>
-              </a:defRPr>
-            </a:pPr>
-            <a:r>
-              <a:t>1. All PSVs  2. Installed  3. Out for Service  4. Overdue  5. Upcoming Due</a:t>
-            </a:r>
-          </a:p>
-          <a:p>
-            <a:pPr>
-              <a:spcAft>
-                <a:spcPts val="1000"/>
-              </a:spcAft>
-              <a:defRPr sz="1800">
-                <a:solidFill>
-                  <a:srgbClr val="1E293B"/>
-                </a:solidFill>
-              </a:defRPr>
-            </a:pPr>
-            <a:r>
-              <a:t>Full register columns: equipment, location, serial, inventory ID, datasheet, dates, compliance</a:t>
-            </a:r>
-          </a:p>
-          <a:p>
-            <a:pPr>
-              <a:spcAft>
-                <a:spcPts val="1000"/>
-              </a:spcAft>
-              <a:defRPr sz="1800">
-                <a:solidFill>
-                  <a:srgbClr val="1E293B"/>
-                </a:solidFill>
-              </a:defRPr>
-            </a:pPr>
-            <a:r>
-              <a:t>Separate from PSV-Import-Template.xlsx (blank template for adding new rows)</a:t>
+                  <a:srgbClr val="FCE7E7"/>
+                </a:solidFill>
+              </a:defRPr>
+            </a:pPr>
+            <a:r>
+              <a:t>Operational visibility for the whole fleet</a:t>
             </a:r>
           </a:p>
         </p:txBody>
@@ -3493,8 +3415,8 @@
         </p:nvSpPr>
         <p:spPr>
           <a:xfrm>
-            <a:off x="640080" y="365760"/>
-            <a:ext cx="10972800" cy="640080"/>
+            <a:off x="640080" y="347472"/>
+            <a:ext cx="10972800" cy="594360"/>
           </a:xfrm>
           <a:prstGeom prst="rect">
             <a:avLst/>
@@ -3515,20 +3437,55 @@
               </a:defRPr>
             </a:pPr>
             <a:r>
-              <a:t>Key Enhancements Delivered</a:t>
-            </a:r>
-          </a:p>
-        </p:txBody>
-      </p:sp>
-      <p:sp>
-        <p:nvSpPr>
-          <p:cNvPr id="3" name="Rectangle 2"/>
+              <a:t>Dashboard Capabilities</a:t>
+            </a:r>
+          </a:p>
+        </p:txBody>
+      </p:sp>
+      <p:sp>
+        <p:nvSpPr>
+          <p:cNvPr id="3" name="TextBox 2"/>
+          <p:cNvSpPr txBox="1"/>
+          <p:nvPr/>
+        </p:nvSpPr>
+        <p:spPr>
+          <a:xfrm>
+            <a:off x="640080" y="868680"/>
+            <a:ext cx="10972800" cy="365760"/>
+          </a:xfrm>
+          <a:prstGeom prst="rect">
+            <a:avLst/>
+          </a:prstGeom>
+          <a:noFill/>
+        </p:spPr>
+        <p:txBody>
+          <a:bodyPr wrap="none">
+            <a:spAutoFit/>
+          </a:bodyPr>
+          <a:lstStyle/>
+          <a:p>
+            <a:pPr>
+              <a:defRPr sz="1300">
+                <a:solidFill>
+                  <a:srgbClr val="64748B"/>
+                </a:solidFill>
+              </a:defRPr>
+            </a:pPr>
+            <a:r>
+              <a:t>reliability-and-compliance-dashboar.vercel.app</a:t>
+            </a:r>
+          </a:p>
+        </p:txBody>
+      </p:sp>
+      <p:sp>
+        <p:nvSpPr>
+          <p:cNvPr id="4" name="Rectangle 3"/>
           <p:cNvSpPr/>
           <p:nvPr/>
         </p:nvSpPr>
         <p:spPr>
           <a:xfrm>
-            <a:off x="640080" y="960120"/>
+            <a:off x="640080" y="1234440"/>
             <a:ext cx="10881360" cy="27432"/>
           </a:xfrm>
           <a:prstGeom prst="rect">
@@ -3565,14 +3522,14 @@
       </p:sp>
       <p:sp>
         <p:nvSpPr>
-          <p:cNvPr id="4" name="TextBox 3"/>
+          <p:cNvPr id="5" name="TextBox 4"/>
           <p:cNvSpPr txBox="1"/>
           <p:nvPr/>
         </p:nvSpPr>
         <p:spPr>
           <a:xfrm>
-            <a:off x="822960" y="1188720"/>
-            <a:ext cx="10789920" cy="5212080"/>
+            <a:off x="777240" y="1417320"/>
+            <a:ext cx="10881360" cy="5303520"/>
           </a:xfrm>
           <a:prstGeom prst="rect">
             <a:avLst/>
@@ -3587,91 +3544,91 @@
           <a:p>
             <a:pPr>
               <a:spcAft>
-                <a:spcPts val="1000"/>
-              </a:spcAft>
-              <a:defRPr sz="1800">
-                <a:solidFill>
-                  <a:srgbClr val="1E293B"/>
-                </a:solidFill>
-              </a:defRPr>
-            </a:pPr>
-            <a:r>
-              <a:t>Inventory ID on PSVs, locations, KPI modal, and all Excel exports</a:t>
-            </a:r>
-          </a:p>
-          <a:p>
-            <a:pPr>
-              <a:spcAft>
-                <a:spcPts val="1000"/>
-              </a:spcAft>
-              <a:defRPr sz="1800">
-                <a:solidFill>
-                  <a:srgbClr val="1E293B"/>
-                </a:solidFill>
-              </a:defRPr>
-            </a:pPr>
-            <a:r>
-              <a:t>Repair / overhaul history separate from status history</a:t>
-            </a:r>
-          </a:p>
-          <a:p>
-            <a:pPr>
-              <a:spcAft>
-                <a:spcPts val="1000"/>
-              </a:spcAft>
-              <a:defRPr sz="1800">
-                <a:solidFill>
-                  <a:srgbClr val="1E293B"/>
-                </a:solidFill>
-              </a:defRPr>
-            </a:pPr>
-            <a:r>
-              <a:t>Status history shows install/inventory changes only</a:t>
-            </a:r>
-          </a:p>
-          <a:p>
-            <a:pPr>
-              <a:spcAft>
-                <a:spcPts val="1000"/>
-              </a:spcAft>
-              <a:defRPr sz="1800">
-                <a:solidFill>
-                  <a:srgbClr val="1E293B"/>
-                </a:solidFill>
-              </a:defRPr>
-            </a:pPr>
-            <a:r>
-              <a:t>Clickable KPI cards with wider detail modal</a:t>
-            </a:r>
-          </a:p>
-          <a:p>
-            <a:pPr>
-              <a:spcAft>
-                <a:spcPts val="1000"/>
-              </a:spcAft>
-              <a:defRPr sz="1800">
-                <a:solidFill>
-                  <a:srgbClr val="1E293B"/>
-                </a:solidFill>
-              </a:defRPr>
-            </a:pPr>
-            <a:r>
-              <a:t>Compliant % includes due-soon valves</a:t>
-            </a:r>
-          </a:p>
-          <a:p>
-            <a:pPr>
-              <a:spcAft>
-                <a:spcPts val="1000"/>
-              </a:spcAft>
-              <a:defRPr sz="1800">
-                <a:solidFill>
-                  <a:srgbClr val="1E293B"/>
-                </a:solidFill>
-              </a:defRPr>
-            </a:pPr>
-            <a:r>
-              <a:t>Excel export rebuilt with 5 focused sheets</a:t>
+                <a:spcPts val="800"/>
+              </a:spcAft>
+              <a:defRPr sz="1700">
+                <a:solidFill>
+                  <a:srgbClr val="1E293B"/>
+                </a:solidFill>
+              </a:defRPr>
+            </a:pPr>
+            <a:r>
+              <a:t>Site-wide KPIs: Total PSVs, Installed, Out for Service, Overdue, Compliant %</a:t>
+            </a:r>
+          </a:p>
+          <a:p>
+            <a:pPr>
+              <a:spcAft>
+                <a:spcPts val="800"/>
+              </a:spcAft>
+              <a:defRPr sz="1700">
+                <a:solidFill>
+                  <a:srgbClr val="1E293B"/>
+                </a:solidFill>
+              </a:defRPr>
+            </a:pPr>
+            <a:r>
+              <a:t>Equipment → Location → PSV hierarchy matching how operators think about the plant</a:t>
+            </a:r>
+          </a:p>
+          <a:p>
+            <a:pPr>
+              <a:spcAft>
+                <a:spcPts val="800"/>
+              </a:spcAft>
+              <a:defRPr sz="1700">
+                <a:solidFill>
+                  <a:srgbClr val="1E293B"/>
+                </a:solidFill>
+              </a:defRPr>
+            </a:pPr>
+            <a:r>
+              <a:t>Automatic 3-year due-date calculation from install or on-site service history</a:t>
+            </a:r>
+          </a:p>
+          <a:p>
+            <a:pPr>
+              <a:spcAft>
+                <a:spcPts val="800"/>
+              </a:spcAft>
+              <a:defRPr sz="1700">
+                <a:solidFill>
+                  <a:srgbClr val="1E293B"/>
+                </a:solidFill>
+              </a:defRPr>
+            </a:pPr>
+            <a:r>
+              <a:t>Inventory ID visible on locations, KPI views, and exports</a:t>
+            </a:r>
+          </a:p>
+          <a:p>
+            <a:pPr>
+              <a:spcAft>
+                <a:spcPts val="800"/>
+              </a:spcAft>
+              <a:defRPr sz="1700">
+                <a:solidFill>
+                  <a:srgbClr val="1E293B"/>
+                </a:solidFill>
+              </a:defRPr>
+            </a:pPr>
+            <a:r>
+              <a:t>Status history and separate repair/overhaul history per valve</a:t>
+            </a:r>
+          </a:p>
+          <a:p>
+            <a:pPr>
+              <a:spcAft>
+                <a:spcPts val="800"/>
+              </a:spcAft>
+              <a:defRPr sz="1700">
+                <a:solidFill>
+                  <a:srgbClr val="1E293B"/>
+                </a:solidFill>
+              </a:defRPr>
+            </a:pPr>
+            <a:r>
+              <a:t>Excel report download: All PSVs, Installed, Out for Service, Overdue, Upcoming Due</a:t>
             </a:r>
           </a:p>
         </p:txBody>
@@ -3710,8 +3667,8 @@
         </p:nvSpPr>
         <p:spPr>
           <a:xfrm>
-            <a:off x="640080" y="365760"/>
-            <a:ext cx="10972800" cy="640080"/>
+            <a:off x="640080" y="347472"/>
+            <a:ext cx="10972800" cy="594360"/>
           </a:xfrm>
           <a:prstGeom prst="rect">
             <a:avLst/>
@@ -3732,7 +3689,7 @@
               </a:defRPr>
             </a:pPr>
             <a:r>
-              <a:t>Where to Find Everything</a:t>
+              <a:t>Dashboard — Fleet Compliance at a Glance</a:t>
             </a:r>
           </a:p>
         </p:txBody>
@@ -3780,16 +3737,40 @@
           </a:p>
         </p:txBody>
       </p:sp>
-      <p:sp>
-        <p:nvSpPr>
-          <p:cNvPr id="4" name="TextBox 3"/>
+      <p:pic>
+        <p:nvPicPr>
+          <p:cNvPr id="4" name="Picture 3" descr="01-dashboard.png"/>
+          <p:cNvPicPr>
+            <a:picLocks noChangeAspect="1"/>
+          </p:cNvPicPr>
+          <p:nvPr/>
+        </p:nvPicPr>
+        <p:blipFill>
+          <a:blip r:embed="rId2"/>
+          <a:stretch>
+            <a:fillRect/>
+          </a:stretch>
+        </p:blipFill>
+        <p:spPr>
+          <a:xfrm>
+            <a:off x="640080" y="1143000"/>
+            <a:ext cx="10972800" cy="6858000"/>
+          </a:xfrm>
+          <a:prstGeom prst="rect">
+            <a:avLst/>
+          </a:prstGeom>
+        </p:spPr>
+      </p:pic>
+      <p:sp>
+        <p:nvSpPr>
+          <p:cNvPr id="5" name="TextBox 4"/>
           <p:cNvSpPr txBox="1"/>
           <p:nvPr/>
         </p:nvSpPr>
         <p:spPr>
           <a:xfrm>
-            <a:off x="822960" y="1188720"/>
-            <a:ext cx="10789920" cy="5212080"/>
+            <a:off x="640080" y="6263640"/>
+            <a:ext cx="10972800" cy="411480"/>
           </a:xfrm>
           <a:prstGeom prst="rect">
             <a:avLst/>
@@ -3797,83 +3778,20 @@
           <a:noFill/>
         </p:spPr>
         <p:txBody>
-          <a:bodyPr wrap="square">
+          <a:bodyPr wrap="none">
             <a:spAutoFit/>
           </a:bodyPr>
           <a:lstStyle/>
           <a:p>
-            <a:pPr>
-              <a:spcAft>
-                <a:spcPts val="1000"/>
-              </a:spcAft>
-              <a:defRPr sz="1800">
-                <a:solidFill>
-                  <a:srgbClr val="1E293B"/>
-                </a:solidFill>
-              </a:defRPr>
-            </a:pPr>
-            <a:r>
-              <a:t>Live app: reliability-and-compliance-dashboar.vercel.app</a:t>
-            </a:r>
-          </a:p>
-          <a:p>
-            <a:pPr>
-              <a:spcAft>
-                <a:spcPts val="1000"/>
-              </a:spcAft>
-              <a:defRPr sz="1800">
-                <a:solidFill>
-                  <a:srgbClr val="1E293B"/>
-                </a:solidFill>
-              </a:defRPr>
-            </a:pPr>
-            <a:r>
-              <a:t>This presentation: docs/presentation/PSV-Dashboard-Overview.pptx</a:t>
-            </a:r>
-          </a:p>
-          <a:p>
-            <a:pPr>
-              <a:spcAft>
-                <a:spcPts val="1000"/>
-              </a:spcAft>
-              <a:defRPr sz="1800">
-                <a:solidFill>
-                  <a:srgbClr val="1E293B"/>
-                </a:solidFill>
-              </a:defRPr>
-            </a:pPr>
-            <a:r>
-              <a:t>GitHub repo: PSV-Compliance-Tracking-Dashboard (main branch)</a:t>
-            </a:r>
-          </a:p>
-          <a:p>
-            <a:pPr>
-              <a:spcAft>
-                <a:spcPts val="1000"/>
-              </a:spcAft>
-              <a:defRPr sz="1800">
-                <a:solidFill>
-                  <a:srgbClr val="1E293B"/>
-                </a:solidFill>
-              </a:defRPr>
-            </a:pPr>
-            <a:r>
-              <a:t>Regenerate deck: python3 scripts/generate_dashboard_ppt.py</a:t>
-            </a:r>
-          </a:p>
-          <a:p>
-            <a:pPr>
-              <a:spcAft>
-                <a:spcPts val="1000"/>
-              </a:spcAft>
-              <a:defRPr sz="1800">
-                <a:solidFill>
-                  <a:srgbClr val="1E293B"/>
-                </a:solidFill>
-              </a:defRPr>
-            </a:pPr>
-            <a:r>
-              <a:t>Refresh screenshots: npm run preview then node scripts/capture-presentation-screenshots.mjs</a:t>
+            <a:pPr algn="ctr">
+              <a:defRPr sz="1200">
+                <a:solidFill>
+                  <a:srgbClr val="64748B"/>
+                </a:solidFill>
+              </a:defRPr>
+            </a:pPr>
+            <a:r>
+              <a:t>Leadership and operators can immediately see compliance posture and drill into equipment</a:t>
             </a:r>
           </a:p>
         </p:txBody>
@@ -3906,20 +3824,55 @@
       <p:grpSpPr/>
       <p:sp>
         <p:nvSpPr>
-          <p:cNvPr id="2" name="Rectangle 1"/>
+          <p:cNvPr id="2" name="TextBox 1"/>
+          <p:cNvSpPr txBox="1"/>
+          <p:nvPr/>
+        </p:nvSpPr>
+        <p:spPr>
+          <a:xfrm>
+            <a:off x="640080" y="347472"/>
+            <a:ext cx="10972800" cy="594360"/>
+          </a:xfrm>
+          <a:prstGeom prst="rect">
+            <a:avLst/>
+          </a:prstGeom>
+          <a:noFill/>
+        </p:spPr>
+        <p:txBody>
+          <a:bodyPr wrap="none">
+            <a:spAutoFit/>
+          </a:bodyPr>
+          <a:lstStyle/>
+          <a:p>
+            <a:pPr>
+              <a:defRPr sz="2600" b="1">
+                <a:solidFill>
+                  <a:srgbClr val="500000"/>
+                </a:solidFill>
+              </a:defRPr>
+            </a:pPr>
+            <a:r>
+              <a:t>KPI Drill-Down</a:t>
+            </a:r>
+          </a:p>
+        </p:txBody>
+      </p:sp>
+      <p:sp>
+        <p:nvSpPr>
+          <p:cNvPr id="3" name="Rectangle 2"/>
           <p:cNvSpPr/>
           <p:nvPr/>
         </p:nvSpPr>
         <p:spPr>
           <a:xfrm>
-            <a:off x="0" y="0"/>
-            <a:ext cx="12188952" cy="137160"/>
+            <a:off x="640080" y="960120"/>
+            <a:ext cx="10881360" cy="27432"/>
           </a:xfrm>
           <a:prstGeom prst="rect">
             <a:avLst/>
           </a:prstGeom>
           <a:solidFill>
-            <a:srgbClr val="500000"/>
+            <a:srgbClr val="B83A3A"/>
           </a:solidFill>
           <a:ln>
             <a:noFill/>
@@ -3947,16 +3900,40 @@
           </a:p>
         </p:txBody>
       </p:sp>
-      <p:sp>
-        <p:nvSpPr>
-          <p:cNvPr id="3" name="TextBox 2"/>
+      <p:pic>
+        <p:nvPicPr>
+          <p:cNvPr id="4" name="Picture 3" descr="02-kpi-modal.png"/>
+          <p:cNvPicPr>
+            <a:picLocks noChangeAspect="1"/>
+          </p:cNvPicPr>
+          <p:nvPr/>
+        </p:nvPicPr>
+        <p:blipFill>
+          <a:blip r:embed="rId2"/>
+          <a:stretch>
+            <a:fillRect/>
+          </a:stretch>
+        </p:blipFill>
+        <p:spPr>
+          <a:xfrm>
+            <a:off x="640080" y="1143000"/>
+            <a:ext cx="10972800" cy="6858000"/>
+          </a:xfrm>
+          <a:prstGeom prst="rect">
+            <a:avLst/>
+          </a:prstGeom>
+        </p:spPr>
+      </p:pic>
+      <p:sp>
+        <p:nvSpPr>
+          <p:cNvPr id="5" name="TextBox 4"/>
           <p:cNvSpPr txBox="1"/>
           <p:nvPr/>
         </p:nvSpPr>
         <p:spPr>
           <a:xfrm>
-            <a:off x="822960" y="2377440"/>
-            <a:ext cx="10515600" cy="1097280"/>
+            <a:off x="640080" y="6263640"/>
+            <a:ext cx="10972800" cy="411480"/>
           </a:xfrm>
           <a:prstGeom prst="rect">
             <a:avLst/>
@@ -3969,29 +3946,55 @@
           </a:bodyPr>
           <a:lstStyle/>
           <a:p>
-            <a:pPr>
-              <a:defRPr sz="3400" b="1">
-                <a:solidFill>
-                  <a:srgbClr val="500000"/>
-                </a:solidFill>
-              </a:defRPr>
-            </a:pPr>
-            <a:r>
-              <a:t>Questions?</a:t>
-            </a:r>
-          </a:p>
-        </p:txBody>
-      </p:sp>
-      <p:sp>
-        <p:nvSpPr>
-          <p:cNvPr id="4" name="TextBox 3"/>
+            <a:pPr algn="ctr">
+              <a:defRPr sz="1200">
+                <a:solidFill>
+                  <a:srgbClr val="64748B"/>
+                </a:solidFill>
+              </a:defRPr>
+            </a:pPr>
+            <a:r>
+              <a:t>Click any KPI to see the exact valves driving that metric — serial, inventory ID, due date, status</a:t>
+            </a:r>
+          </a:p>
+        </p:txBody>
+      </p:sp>
+    </p:spTree>
+  </p:cSld>
+  <p:clrMapOvr>
+    <a:masterClrMapping/>
+  </p:clrMapOvr>
+</p:sld>
+</file>
+
+<file path=ppt/slides/slide14.xml><?xml version="1.0" encoding="utf-8"?>
+<p:sld xmlns:a="http://schemas.openxmlformats.org/drawingml/2006/main" xmlns:p="http://schemas.openxmlformats.org/presentationml/2006/main" xmlns:r="http://schemas.openxmlformats.org/officeDocument/2006/relationships">
+  <p:cSld>
+    <p:bg>
+      <p:bgPr>
+        <a:solidFill>
+          <a:srgbClr val="FFFFFF"/>
+        </a:solidFill>
+        <a:effectLst/>
+      </p:bgPr>
+    </p:bg>
+    <p:spTree>
+      <p:nvGrpSpPr>
+        <p:cNvPr id="1" name=""/>
+        <p:cNvGrpSpPr/>
+        <p:nvPr/>
+      </p:nvGrpSpPr>
+      <p:grpSpPr/>
+      <p:sp>
+        <p:nvSpPr>
+          <p:cNvPr id="2" name="TextBox 1"/>
           <p:cNvSpPr txBox="1"/>
           <p:nvPr/>
         </p:nvSpPr>
         <p:spPr>
           <a:xfrm>
-            <a:off x="822960" y="3291840"/>
-            <a:ext cx="10515600" cy="1097280"/>
+            <a:off x="640080" y="347472"/>
+            <a:ext cx="10972800" cy="594360"/>
           </a:xfrm>
           <a:prstGeom prst="rect">
             <a:avLst/>
@@ -4005,14 +4008,1269 @@
           <a:lstStyle/>
           <a:p>
             <a:pPr>
+              <a:defRPr sz="2600" b="1">
+                <a:solidFill>
+                  <a:srgbClr val="500000"/>
+                </a:solidFill>
+              </a:defRPr>
+            </a:pPr>
+            <a:r>
+              <a:t>Equipment &amp; Location Views</a:t>
+            </a:r>
+          </a:p>
+        </p:txBody>
+      </p:sp>
+      <p:sp>
+        <p:nvSpPr>
+          <p:cNvPr id="3" name="Rectangle 2"/>
+          <p:cNvSpPr/>
+          <p:nvPr/>
+        </p:nvSpPr>
+        <p:spPr>
+          <a:xfrm>
+            <a:off x="640080" y="960120"/>
+            <a:ext cx="10881360" cy="27432"/>
+          </a:xfrm>
+          <a:prstGeom prst="rect">
+            <a:avLst/>
+          </a:prstGeom>
+          <a:solidFill>
+            <a:srgbClr val="B83A3A"/>
+          </a:solidFill>
+          <a:ln>
+            <a:noFill/>
+          </a:ln>
+        </p:spPr>
+        <p:style>
+          <a:lnRef idx="1">
+            <a:schemeClr val="accent1"/>
+          </a:lnRef>
+          <a:fillRef idx="3">
+            <a:schemeClr val="accent1"/>
+          </a:fillRef>
+          <a:effectRef idx="2">
+            <a:schemeClr val="accent1"/>
+          </a:effectRef>
+          <a:fontRef idx="minor">
+            <a:schemeClr val="lt1"/>
+          </a:fontRef>
+        </p:style>
+        <p:txBody>
+          <a:bodyPr rtlCol="0" anchor="ctr"/>
+          <a:lstStyle/>
+          <a:p>
+            <a:pPr algn="ctr"/>
+          </a:p>
+        </p:txBody>
+      </p:sp>
+      <p:pic>
+        <p:nvPicPr>
+          <p:cNvPr id="4" name="Picture 3" descr="03-equipment.png"/>
+          <p:cNvPicPr>
+            <a:picLocks noChangeAspect="1"/>
+          </p:cNvPicPr>
+          <p:nvPr/>
+        </p:nvPicPr>
+        <p:blipFill>
+          <a:blip r:embed="rId2"/>
+          <a:stretch>
+            <a:fillRect/>
+          </a:stretch>
+        </p:blipFill>
+        <p:spPr>
+          <a:xfrm>
+            <a:off x="640080" y="1143000"/>
+            <a:ext cx="10972800" cy="6858000"/>
+          </a:xfrm>
+          <a:prstGeom prst="rect">
+            <a:avLst/>
+          </a:prstGeom>
+        </p:spPr>
+      </p:pic>
+      <p:sp>
+        <p:nvSpPr>
+          <p:cNvPr id="5" name="TextBox 4"/>
+          <p:cNvSpPr txBox="1"/>
+          <p:nvPr/>
+        </p:nvSpPr>
+        <p:spPr>
+          <a:xfrm>
+            <a:off x="640080" y="6263640"/>
+            <a:ext cx="10972800" cy="411480"/>
+          </a:xfrm>
+          <a:prstGeom prst="rect">
+            <a:avLst/>
+          </a:prstGeom>
+          <a:noFill/>
+        </p:spPr>
+        <p:txBody>
+          <a:bodyPr wrap="none">
+            <a:spAutoFit/>
+          </a:bodyPr>
+          <a:lstStyle/>
+          <a:p>
+            <a:pPr algn="ctr">
+              <a:defRPr sz="1200">
+                <a:solidFill>
+                  <a:srgbClr val="64748B"/>
+                </a:solidFill>
+              </a:defRPr>
+            </a:pPr>
+            <a:r>
+              <a:t>Scoped view per boiler with location-level inventory ID and installed valve due dates</a:t>
+            </a:r>
+          </a:p>
+        </p:txBody>
+      </p:sp>
+    </p:spTree>
+  </p:cSld>
+  <p:clrMapOvr>
+    <a:masterClrMapping/>
+  </p:clrMapOvr>
+</p:sld>
+</file>
+
+<file path=ppt/slides/slide15.xml><?xml version="1.0" encoding="utf-8"?>
+<p:sld xmlns:a="http://schemas.openxmlformats.org/drawingml/2006/main" xmlns:p="http://schemas.openxmlformats.org/presentationml/2006/main" xmlns:r="http://schemas.openxmlformats.org/officeDocument/2006/relationships">
+  <p:cSld>
+    <p:bg>
+      <p:bgPr>
+        <a:solidFill>
+          <a:srgbClr val="FFFFFF"/>
+        </a:solidFill>
+        <a:effectLst/>
+      </p:bgPr>
+    </p:bg>
+    <p:spTree>
+      <p:nvGrpSpPr>
+        <p:cNvPr id="1" name=""/>
+        <p:cNvGrpSpPr/>
+        <p:nvPr/>
+      </p:nvGrpSpPr>
+      <p:grpSpPr/>
+      <p:sp>
+        <p:nvSpPr>
+          <p:cNvPr id="2" name="TextBox 1"/>
+          <p:cNvSpPr txBox="1"/>
+          <p:nvPr/>
+        </p:nvSpPr>
+        <p:spPr>
+          <a:xfrm>
+            <a:off x="640080" y="347472"/>
+            <a:ext cx="10972800" cy="594360"/>
+          </a:xfrm>
+          <a:prstGeom prst="rect">
+            <a:avLst/>
+          </a:prstGeom>
+          <a:noFill/>
+        </p:spPr>
+        <p:txBody>
+          <a:bodyPr wrap="none">
+            <a:spAutoFit/>
+          </a:bodyPr>
+          <a:lstStyle/>
+          <a:p>
+            <a:pPr>
+              <a:defRPr sz="2600" b="1">
+                <a:solidFill>
+                  <a:srgbClr val="500000"/>
+                </a:solidFill>
+              </a:defRPr>
+            </a:pPr>
+            <a:r>
+              <a:t>Valve Record Detail</a:t>
+            </a:r>
+          </a:p>
+        </p:txBody>
+      </p:sp>
+      <p:sp>
+        <p:nvSpPr>
+          <p:cNvPr id="3" name="Rectangle 2"/>
+          <p:cNvSpPr/>
+          <p:nvPr/>
+        </p:nvSpPr>
+        <p:spPr>
+          <a:xfrm>
+            <a:off x="640080" y="960120"/>
+            <a:ext cx="10881360" cy="27432"/>
+          </a:xfrm>
+          <a:prstGeom prst="rect">
+            <a:avLst/>
+          </a:prstGeom>
+          <a:solidFill>
+            <a:srgbClr val="B83A3A"/>
+          </a:solidFill>
+          <a:ln>
+            <a:noFill/>
+          </a:ln>
+        </p:spPr>
+        <p:style>
+          <a:lnRef idx="1">
+            <a:schemeClr val="accent1"/>
+          </a:lnRef>
+          <a:fillRef idx="3">
+            <a:schemeClr val="accent1"/>
+          </a:fillRef>
+          <a:effectRef idx="2">
+            <a:schemeClr val="accent1"/>
+          </a:effectRef>
+          <a:fontRef idx="minor">
+            <a:schemeClr val="lt1"/>
+          </a:fontRef>
+        </p:style>
+        <p:txBody>
+          <a:bodyPr rtlCol="0" anchor="ctr"/>
+          <a:lstStyle/>
+          <a:p>
+            <a:pPr algn="ctr"/>
+          </a:p>
+        </p:txBody>
+      </p:sp>
+      <p:pic>
+        <p:nvPicPr>
+          <p:cNvPr id="4" name="Picture 3" descr="05-psv-detail.png"/>
+          <p:cNvPicPr>
+            <a:picLocks noChangeAspect="1"/>
+          </p:cNvPicPr>
+          <p:nvPr/>
+        </p:nvPicPr>
+        <p:blipFill>
+          <a:blip r:embed="rId2"/>
+          <a:stretch>
+            <a:fillRect/>
+          </a:stretch>
+        </p:blipFill>
+        <p:spPr>
+          <a:xfrm>
+            <a:off x="640080" y="1143000"/>
+            <a:ext cx="10972800" cy="6858000"/>
+          </a:xfrm>
+          <a:prstGeom prst="rect">
+            <a:avLst/>
+          </a:prstGeom>
+        </p:spPr>
+      </p:pic>
+      <p:sp>
+        <p:nvSpPr>
+          <p:cNvPr id="5" name="TextBox 4"/>
+          <p:cNvSpPr txBox="1"/>
+          <p:nvPr/>
+        </p:nvSpPr>
+        <p:spPr>
+          <a:xfrm>
+            <a:off x="640080" y="6263640"/>
+            <a:ext cx="10972800" cy="411480"/>
+          </a:xfrm>
+          <a:prstGeom prst="rect">
+            <a:avLst/>
+          </a:prstGeom>
+          <a:noFill/>
+        </p:spPr>
+        <p:txBody>
+          <a:bodyPr wrap="none">
+            <a:spAutoFit/>
+          </a:bodyPr>
+          <a:lstStyle/>
+          <a:p>
+            <a:pPr algn="ctr">
+              <a:defRPr sz="1200">
+                <a:solidFill>
+                  <a:srgbClr val="64748B"/>
+                </a:solidFill>
+              </a:defRPr>
+            </a:pPr>
+            <a:r>
+              <a:t>Full datasheet, compliance clock, status history, and repair/overhaul log in one place</a:t>
+            </a:r>
+          </a:p>
+        </p:txBody>
+      </p:sp>
+    </p:spTree>
+  </p:cSld>
+  <p:clrMapOvr>
+    <a:masterClrMapping/>
+  </p:clrMapOvr>
+</p:sld>
+</file>
+
+<file path=ppt/slides/slide16.xml><?xml version="1.0" encoding="utf-8"?>
+<p:sld xmlns:a="http://schemas.openxmlformats.org/drawingml/2006/main" xmlns:p="http://schemas.openxmlformats.org/presentationml/2006/main" xmlns:r="http://schemas.openxmlformats.org/officeDocument/2006/relationships">
+  <p:cSld>
+    <p:bg>
+      <p:bgPr>
+        <a:solidFill>
+          <a:srgbClr val="500000"/>
+        </a:solidFill>
+        <a:effectLst/>
+      </p:bgPr>
+    </p:bg>
+    <p:spTree>
+      <p:nvGrpSpPr>
+        <p:cNvPr id="1" name=""/>
+        <p:cNvGrpSpPr/>
+        <p:nvPr/>
+      </p:nvGrpSpPr>
+      <p:grpSpPr/>
+      <p:sp>
+        <p:nvSpPr>
+          <p:cNvPr id="2" name="TextBox 1"/>
+          <p:cNvSpPr txBox="1"/>
+          <p:nvPr/>
+        </p:nvSpPr>
+        <p:spPr>
+          <a:xfrm>
+            <a:off x="822960" y="2560320"/>
+            <a:ext cx="10515600" cy="1097280"/>
+          </a:xfrm>
+          <a:prstGeom prst="rect">
+            <a:avLst/>
+          </a:prstGeom>
+          <a:noFill/>
+        </p:spPr>
+        <p:txBody>
+          <a:bodyPr wrap="none">
+            <a:spAutoFit/>
+          </a:bodyPr>
+          <a:lstStyle/>
+          <a:p>
+            <a:pPr algn="ctr">
+              <a:defRPr sz="3600" b="1">
+                <a:solidFill>
+                  <a:srgbClr val="FFFFFF"/>
+                </a:solidFill>
+              </a:defRPr>
+            </a:pPr>
+            <a:r>
+              <a:t>Phase 4 — Maintenance Strategy</a:t>
+            </a:r>
+          </a:p>
+        </p:txBody>
+      </p:sp>
+      <p:sp>
+        <p:nvSpPr>
+          <p:cNvPr id="3" name="TextBox 2"/>
+          <p:cNvSpPr txBox="1"/>
+          <p:nvPr/>
+        </p:nvSpPr>
+        <p:spPr>
+          <a:xfrm>
+            <a:off x="822960" y="3566160"/>
+            <a:ext cx="10515600" cy="914400"/>
+          </a:xfrm>
+          <a:prstGeom prst="rect">
+            <a:avLst/>
+          </a:prstGeom>
+          <a:noFill/>
+        </p:spPr>
+        <p:txBody>
+          <a:bodyPr wrap="none">
+            <a:spAutoFit/>
+          </a:bodyPr>
+          <a:lstStyle/>
+          <a:p>
+            <a:pPr algn="ctr">
               <a:defRPr sz="1800">
                 <a:solidFill>
+                  <a:srgbClr val="FCE7E7"/>
+                </a:solidFill>
+              </a:defRPr>
+            </a:pPr>
+            <a:r>
+              <a:t>Formal PSV/SRV program document for UES operations</a:t>
+            </a:r>
+          </a:p>
+        </p:txBody>
+      </p:sp>
+    </p:spTree>
+  </p:cSld>
+  <p:clrMapOvr>
+    <a:masterClrMapping/>
+  </p:clrMapOvr>
+</p:sld>
+</file>
+
+<file path=ppt/slides/slide17.xml><?xml version="1.0" encoding="utf-8"?>
+<p:sld xmlns:a="http://schemas.openxmlformats.org/drawingml/2006/main" xmlns:p="http://schemas.openxmlformats.org/presentationml/2006/main" xmlns:r="http://schemas.openxmlformats.org/officeDocument/2006/relationships">
+  <p:cSld>
+    <p:bg>
+      <p:bgPr>
+        <a:solidFill>
+          <a:srgbClr val="FFFFFF"/>
+        </a:solidFill>
+        <a:effectLst/>
+      </p:bgPr>
+    </p:bg>
+    <p:spTree>
+      <p:nvGrpSpPr>
+        <p:cNvPr id="1" name=""/>
+        <p:cNvGrpSpPr/>
+        <p:nvPr/>
+      </p:nvGrpSpPr>
+      <p:grpSpPr/>
+      <p:sp>
+        <p:nvSpPr>
+          <p:cNvPr id="2" name="TextBox 1"/>
+          <p:cNvSpPr txBox="1"/>
+          <p:nvPr/>
+        </p:nvSpPr>
+        <p:spPr>
+          <a:xfrm>
+            <a:off x="640080" y="347472"/>
+            <a:ext cx="10972800" cy="594360"/>
+          </a:xfrm>
+          <a:prstGeom prst="rect">
+            <a:avLst/>
+          </a:prstGeom>
+          <a:noFill/>
+        </p:spPr>
+        <p:txBody>
+          <a:bodyPr wrap="none">
+            <a:spAutoFit/>
+          </a:bodyPr>
+          <a:lstStyle/>
+          <a:p>
+            <a:pPr>
+              <a:defRPr sz="2600" b="1">
+                <a:solidFill>
+                  <a:srgbClr val="500000"/>
+                </a:solidFill>
+              </a:defRPr>
+            </a:pPr>
+            <a:r>
+              <a:t>PM Intervals &amp; Triggers</a:t>
+            </a:r>
+          </a:p>
+        </p:txBody>
+      </p:sp>
+      <p:sp>
+        <p:nvSpPr>
+          <p:cNvPr id="3" name="TextBox 2"/>
+          <p:cNvSpPr txBox="1"/>
+          <p:nvPr/>
+        </p:nvSpPr>
+        <p:spPr>
+          <a:xfrm>
+            <a:off x="640080" y="868680"/>
+            <a:ext cx="10972800" cy="365760"/>
+          </a:xfrm>
+          <a:prstGeom prst="rect">
+            <a:avLst/>
+          </a:prstGeom>
+          <a:noFill/>
+        </p:spPr>
+        <p:txBody>
+          <a:bodyPr wrap="none">
+            <a:spAutoFit/>
+          </a:bodyPr>
+          <a:lstStyle/>
+          <a:p>
+            <a:pPr>
+              <a:defRPr sz="1300">
+                <a:solidFill>
                   <a:srgbClr val="64748B"/>
                 </a:solidFill>
               </a:defRPr>
             </a:pPr>
             <a:r>
-              <a:t>PSV Compliance Tracking Dashboard · Texas A&amp;M UES</a:t>
+              <a:t>Maximum intervals shown — UES should complete before due date</a:t>
+            </a:r>
+          </a:p>
+        </p:txBody>
+      </p:sp>
+      <p:sp>
+        <p:nvSpPr>
+          <p:cNvPr id="4" name="Rectangle 3"/>
+          <p:cNvSpPr/>
+          <p:nvPr/>
+        </p:nvSpPr>
+        <p:spPr>
+          <a:xfrm>
+            <a:off x="640080" y="1234440"/>
+            <a:ext cx="10881360" cy="27432"/>
+          </a:xfrm>
+          <a:prstGeom prst="rect">
+            <a:avLst/>
+          </a:prstGeom>
+          <a:solidFill>
+            <a:srgbClr val="B83A3A"/>
+          </a:solidFill>
+          <a:ln>
+            <a:noFill/>
+          </a:ln>
+        </p:spPr>
+        <p:style>
+          <a:lnRef idx="1">
+            <a:schemeClr val="accent1"/>
+          </a:lnRef>
+          <a:fillRef idx="3">
+            <a:schemeClr val="accent1"/>
+          </a:fillRef>
+          <a:effectRef idx="2">
+            <a:schemeClr val="accent1"/>
+          </a:effectRef>
+          <a:fontRef idx="minor">
+            <a:schemeClr val="lt1"/>
+          </a:fontRef>
+        </p:style>
+        <p:txBody>
+          <a:bodyPr rtlCol="0" anchor="ctr"/>
+          <a:lstStyle/>
+          <a:p>
+            <a:pPr algn="ctr"/>
+          </a:p>
+        </p:txBody>
+      </p:sp>
+      <p:sp>
+        <p:nvSpPr>
+          <p:cNvPr id="5" name="TextBox 4"/>
+          <p:cNvSpPr txBox="1"/>
+          <p:nvPr/>
+        </p:nvSpPr>
+        <p:spPr>
+          <a:xfrm>
+            <a:off x="777240" y="1417320"/>
+            <a:ext cx="10881360" cy="5303520"/>
+          </a:xfrm>
+          <a:prstGeom prst="rect">
+            <a:avLst/>
+          </a:prstGeom>
+          <a:noFill/>
+        </p:spPr>
+        <p:txBody>
+          <a:bodyPr wrap="square">
+            <a:spAutoFit/>
+          </a:bodyPr>
+          <a:lstStyle/>
+          <a:p>
+            <a:pPr>
+              <a:spcAft>
+                <a:spcPts val="800"/>
+              </a:spcAft>
+              <a:defRPr sz="1700">
+                <a:solidFill>
+                  <a:srgbClr val="1E293B"/>
+                </a:solidFill>
+              </a:defRPr>
+            </a:pPr>
+            <a:r>
+              <a:t>Formal pop test &amp; overhaul (Setpoint): every 3 years — code minimum (NBIC Part 2, ASME Sec. I, 16 TAC Ch. 65)</a:t>
+            </a:r>
+          </a:p>
+          <a:p>
+            <a:pPr>
+              <a:spcAft>
+                <a:spcPts val="800"/>
+              </a:spcAft>
+              <a:defRPr sz="1700">
+                <a:solidFill>
+                  <a:srgbClr val="1E293B"/>
+                </a:solidFill>
+              </a:defRPr>
+            </a:pPr>
+            <a:r>
+              <a:t>Visual field walkdown: semi-annually — eyes-on check for weeping, corrosion, discharge issues (API RP 576)</a:t>
+            </a:r>
+          </a:p>
+          <a:p>
+            <a:pPr>
+              <a:spcAft>
+                <a:spcPts val="800"/>
+              </a:spcAft>
+              <a:defRPr sz="1700">
+                <a:solidFill>
+                  <a:srgbClr val="1E293B"/>
+                </a:solidFill>
+              </a:defRPr>
+            </a:pPr>
+            <a:r>
+              <a:t>Manual lever test: annual only if management approves — PG-73.1.3 allows but seat-damage risk exists</a:t>
+            </a:r>
+          </a:p>
+          <a:p>
+            <a:pPr>
+              <a:spcAft>
+                <a:spcPts val="800"/>
+              </a:spcAft>
+              <a:defRPr sz="1700">
+                <a:solidFill>
+                  <a:srgbClr val="1E293B"/>
+                </a:solidFill>
+              </a:defRPr>
+            </a:pPr>
+            <a:r>
+              <a:t>Condition-based inspection: immediately on leakage, chattering, actuation, or visible damage</a:t>
+            </a:r>
+          </a:p>
+          <a:p>
+            <a:pPr>
+              <a:spcAft>
+                <a:spcPts val="800"/>
+              </a:spcAft>
+              <a:defRPr sz="1700">
+                <a:solidFill>
+                  <a:srgbClr val="1E293B"/>
+                </a:solidFill>
+              </a:defRPr>
+            </a:pPr>
+            <a:r>
+              <a:t>Strategy distinguishes planned PM from emergency response</a:t>
+            </a:r>
+          </a:p>
+        </p:txBody>
+      </p:sp>
+    </p:spTree>
+  </p:cSld>
+  <p:clrMapOvr>
+    <a:masterClrMapping/>
+  </p:clrMapOvr>
+</p:sld>
+</file>
+
+<file path=ppt/slides/slide18.xml><?xml version="1.0" encoding="utf-8"?>
+<p:sld xmlns:a="http://schemas.openxmlformats.org/drawingml/2006/main" xmlns:p="http://schemas.openxmlformats.org/presentationml/2006/main" xmlns:r="http://schemas.openxmlformats.org/officeDocument/2006/relationships">
+  <p:cSld>
+    <p:bg>
+      <p:bgPr>
+        <a:solidFill>
+          <a:srgbClr val="FFFFFF"/>
+        </a:solidFill>
+        <a:effectLst/>
+      </p:bgPr>
+    </p:bg>
+    <p:spTree>
+      <p:nvGrpSpPr>
+        <p:cNvPr id="1" name=""/>
+        <p:cNvGrpSpPr/>
+        <p:nvPr/>
+      </p:nvGrpSpPr>
+      <p:grpSpPr/>
+      <p:sp>
+        <p:nvSpPr>
+          <p:cNvPr id="2" name="TextBox 1"/>
+          <p:cNvSpPr txBox="1"/>
+          <p:nvPr/>
+        </p:nvSpPr>
+        <p:spPr>
+          <a:xfrm>
+            <a:off x="640080" y="347472"/>
+            <a:ext cx="10972800" cy="594360"/>
+          </a:xfrm>
+          <a:prstGeom prst="rect">
+            <a:avLst/>
+          </a:prstGeom>
+          <a:noFill/>
+        </p:spPr>
+        <p:txBody>
+          <a:bodyPr wrap="none">
+            <a:spAutoFit/>
+          </a:bodyPr>
+          <a:lstStyle/>
+          <a:p>
+            <a:pPr>
+              <a:defRPr sz="2600" b="1">
+                <a:solidFill>
+                  <a:srgbClr val="500000"/>
+                </a:solidFill>
+              </a:defRPr>
+            </a:pPr>
+            <a:r>
+              <a:t>Testing Methods — Send-Out vs. In-Place</a:t>
+            </a:r>
+          </a:p>
+        </p:txBody>
+      </p:sp>
+      <p:sp>
+        <p:nvSpPr>
+          <p:cNvPr id="3" name="TextBox 2"/>
+          <p:cNvSpPr txBox="1"/>
+          <p:nvPr/>
+        </p:nvSpPr>
+        <p:spPr>
+          <a:xfrm>
+            <a:off x="640080" y="868680"/>
+            <a:ext cx="10972800" cy="365760"/>
+          </a:xfrm>
+          <a:prstGeom prst="rect">
+            <a:avLst/>
+          </a:prstGeom>
+          <a:noFill/>
+        </p:spPr>
+        <p:txBody>
+          <a:bodyPr wrap="none">
+            <a:spAutoFit/>
+          </a:bodyPr>
+          <a:lstStyle/>
+          <a:p>
+            <a:pPr>
+              <a:defRPr sz="1300">
+                <a:solidFill>
+                  <a:srgbClr val="64748B"/>
+                </a:solidFill>
+              </a:defRPr>
+            </a:pPr>
+            <a:r>
+              <a:t>Long-term goal: spare coverage for all valves to enable send-out testing fleet-wide</a:t>
+            </a:r>
+          </a:p>
+        </p:txBody>
+      </p:sp>
+      <p:sp>
+        <p:nvSpPr>
+          <p:cNvPr id="4" name="Rectangle 3"/>
+          <p:cNvSpPr/>
+          <p:nvPr/>
+        </p:nvSpPr>
+        <p:spPr>
+          <a:xfrm>
+            <a:off x="640080" y="1234440"/>
+            <a:ext cx="10881360" cy="27432"/>
+          </a:xfrm>
+          <a:prstGeom prst="rect">
+            <a:avLst/>
+          </a:prstGeom>
+          <a:solidFill>
+            <a:srgbClr val="B83A3A"/>
+          </a:solidFill>
+          <a:ln>
+            <a:noFill/>
+          </a:ln>
+        </p:spPr>
+        <p:style>
+          <a:lnRef idx="1">
+            <a:schemeClr val="accent1"/>
+          </a:lnRef>
+          <a:fillRef idx="3">
+            <a:schemeClr val="accent1"/>
+          </a:fillRef>
+          <a:effectRef idx="2">
+            <a:schemeClr val="accent1"/>
+          </a:effectRef>
+          <a:fontRef idx="minor">
+            <a:schemeClr val="lt1"/>
+          </a:fontRef>
+        </p:style>
+        <p:txBody>
+          <a:bodyPr rtlCol="0" anchor="ctr"/>
+          <a:lstStyle/>
+          <a:p>
+            <a:pPr algn="ctr"/>
+          </a:p>
+        </p:txBody>
+      </p:sp>
+      <p:sp>
+        <p:nvSpPr>
+          <p:cNvPr id="5" name="TextBox 4"/>
+          <p:cNvSpPr txBox="1"/>
+          <p:nvPr/>
+        </p:nvSpPr>
+        <p:spPr>
+          <a:xfrm>
+            <a:off x="640080" y="1234440"/>
+            <a:ext cx="5303520" cy="320040"/>
+          </a:xfrm>
+          <a:prstGeom prst="rect">
+            <a:avLst/>
+          </a:prstGeom>
+          <a:noFill/>
+        </p:spPr>
+        <p:txBody>
+          <a:bodyPr wrap="none">
+            <a:spAutoFit/>
+          </a:bodyPr>
+          <a:lstStyle/>
+          <a:p>
+            <a:pPr>
+              <a:defRPr sz="1400" b="1">
+                <a:solidFill>
+                  <a:srgbClr val="500000"/>
+                </a:solidFill>
+              </a:defRPr>
+            </a:pPr>
+            <a:r>
+              <a:t>Send-out (preferred when spare exists)</a:t>
+            </a:r>
+          </a:p>
+        </p:txBody>
+      </p:sp>
+      <p:sp>
+        <p:nvSpPr>
+          <p:cNvPr id="6" name="TextBox 5"/>
+          <p:cNvSpPr txBox="1"/>
+          <p:nvPr/>
+        </p:nvSpPr>
+        <p:spPr>
+          <a:xfrm>
+            <a:off x="640080" y="1554480"/>
+            <a:ext cx="5394960" cy="4754880"/>
+          </a:xfrm>
+          <a:prstGeom prst="rect">
+            <a:avLst/>
+          </a:prstGeom>
+          <a:noFill/>
+        </p:spPr>
+        <p:txBody>
+          <a:bodyPr wrap="square">
+            <a:spAutoFit/>
+          </a:bodyPr>
+          <a:lstStyle/>
+          <a:p>
+            <a:pPr>
+              <a:spcAft>
+                <a:spcPts val="600"/>
+              </a:spcAft>
+              <a:defRPr sz="1500">
+                <a:solidFill>
+                  <a:srgbClr val="1E293B"/>
+                </a:solidFill>
+              </a:defRPr>
+            </a:pPr>
+            <a:r>
+              <a:t>Valve removed; spare installed</a:t>
+            </a:r>
+          </a:p>
+          <a:p>
+            <a:pPr>
+              <a:spcAft>
+                <a:spcPts val="600"/>
+              </a:spcAft>
+              <a:defRPr sz="1500">
+                <a:solidFill>
+                  <a:srgbClr val="1E293B"/>
+                </a:solidFill>
+              </a:defRPr>
+            </a:pPr>
+            <a:r>
+              <a:t>Full bench overhaul at Setpoint shop</a:t>
+            </a:r>
+          </a:p>
+          <a:p>
+            <a:pPr>
+              <a:spcAft>
+                <a:spcPts val="600"/>
+              </a:spcAft>
+              <a:defRPr sz="1500">
+                <a:solidFill>
+                  <a:srgbClr val="1E293B"/>
+                </a:solidFill>
+              </a:defRPr>
+            </a:pPr>
+            <a:r>
+              <a:t>Internal inspection, lapping, spring check</a:t>
+            </a:r>
+          </a:p>
+          <a:p>
+            <a:pPr>
+              <a:spcAft>
+                <a:spcPts val="600"/>
+              </a:spcAft>
+              <a:defRPr sz="1500">
+                <a:solidFill>
+                  <a:srgbClr val="1E293B"/>
+                </a:solidFill>
+              </a:defRPr>
+            </a:pPr>
+            <a:r>
+              <a:t>Complete condition assessment</a:t>
+            </a:r>
+          </a:p>
+          <a:p>
+            <a:pPr>
+              <a:spcAft>
+                <a:spcPts val="600"/>
+              </a:spcAft>
+              <a:defRPr sz="1500">
+                <a:solidFill>
+                  <a:srgbClr val="1E293B"/>
+                </a:solidFill>
+              </a:defRPr>
+            </a:pPr>
+            <a:r>
+              <a:t>Lower seat-damage risk</a:t>
+            </a:r>
+          </a:p>
+        </p:txBody>
+      </p:sp>
+      <p:sp>
+        <p:nvSpPr>
+          <p:cNvPr id="7" name="TextBox 6"/>
+          <p:cNvSpPr txBox="1"/>
+          <p:nvPr/>
+        </p:nvSpPr>
+        <p:spPr>
+          <a:xfrm>
+            <a:off x="6172200" y="1234440"/>
+            <a:ext cx="5303520" cy="320040"/>
+          </a:xfrm>
+          <a:prstGeom prst="rect">
+            <a:avLst/>
+          </a:prstGeom>
+          <a:noFill/>
+        </p:spPr>
+        <p:txBody>
+          <a:bodyPr wrap="none">
+            <a:spAutoFit/>
+          </a:bodyPr>
+          <a:lstStyle/>
+          <a:p>
+            <a:pPr>
+              <a:defRPr sz="1400" b="1">
+                <a:solidFill>
+                  <a:srgbClr val="500000"/>
+                </a:solidFill>
+              </a:defRPr>
+            </a:pPr>
+            <a:r>
+              <a:t>In-place (when no spare exists)</a:t>
+            </a:r>
+          </a:p>
+        </p:txBody>
+      </p:sp>
+      <p:sp>
+        <p:nvSpPr>
+          <p:cNvPr id="8" name="TextBox 7"/>
+          <p:cNvSpPr txBox="1"/>
+          <p:nvPr/>
+        </p:nvSpPr>
+        <p:spPr>
+          <a:xfrm>
+            <a:off x="6172200" y="1554480"/>
+            <a:ext cx="5394960" cy="4754880"/>
+          </a:xfrm>
+          <a:prstGeom prst="rect">
+            <a:avLst/>
+          </a:prstGeom>
+          <a:noFill/>
+        </p:spPr>
+        <p:txBody>
+          <a:bodyPr wrap="square">
+            <a:spAutoFit/>
+          </a:bodyPr>
+          <a:lstStyle/>
+          <a:p>
+            <a:pPr>
+              <a:spcAft>
+                <a:spcPts val="600"/>
+              </a:spcAft>
+              <a:defRPr sz="1500">
+                <a:solidFill>
+                  <a:srgbClr val="1E293B"/>
+                </a:solidFill>
+              </a:defRPr>
+            </a:pPr>
+            <a:r>
+              <a:t>Setpoint tests on live system</a:t>
+            </a:r>
+          </a:p>
+          <a:p>
+            <a:pPr>
+              <a:spcAft>
+                <a:spcPts val="600"/>
+              </a:spcAft>
+              <a:defRPr sz="1500">
+                <a:solidFill>
+                  <a:srgbClr val="1E293B"/>
+                </a:solidFill>
+              </a:defRPr>
+            </a:pPr>
+            <a:r>
+              <a:t>Equivalent certification issued</a:t>
+            </a:r>
+          </a:p>
+          <a:p>
+            <a:pPr>
+              <a:spcAft>
+                <a:spcPts val="600"/>
+              </a:spcAft>
+              <a:defRPr sz="1500">
+                <a:solidFill>
+                  <a:srgbClr val="1E293B"/>
+                </a:solidFill>
+              </a:defRPr>
+            </a:pPr>
+            <a:r>
+              <a:t>Functional lift test only — no disassembly</a:t>
+            </a:r>
+          </a:p>
+          <a:p>
+            <a:pPr>
+              <a:spcAft>
+                <a:spcPts val="600"/>
+              </a:spcAft>
+              <a:defRPr sz="1500">
+                <a:solidFill>
+                  <a:srgbClr val="1E293B"/>
+                </a:solidFill>
+              </a:defRPr>
+            </a:pPr>
+            <a:r>
+              <a:t>Higher seat-damage risk on older valves</a:t>
+            </a:r>
+          </a:p>
+          <a:p>
+            <a:pPr>
+              <a:spcAft>
+                <a:spcPts val="600"/>
+              </a:spcAft>
+              <a:defRPr sz="1500">
+                <a:solidFill>
+                  <a:srgbClr val="1E293B"/>
+                </a:solidFill>
+              </a:defRPr>
+            </a:pPr>
+            <a:r>
+              <a:t>Interim measure until spare acquired</a:t>
+            </a:r>
+          </a:p>
+        </p:txBody>
+      </p:sp>
+    </p:spTree>
+  </p:cSld>
+  <p:clrMapOvr>
+    <a:masterClrMapping/>
+  </p:clrMapOvr>
+</p:sld>
+</file>
+
+<file path=ppt/slides/slide19.xml><?xml version="1.0" encoding="utf-8"?>
+<p:sld xmlns:a="http://schemas.openxmlformats.org/drawingml/2006/main" xmlns:p="http://schemas.openxmlformats.org/presentationml/2006/main" xmlns:r="http://schemas.openxmlformats.org/officeDocument/2006/relationships">
+  <p:cSld>
+    <p:bg>
+      <p:bgPr>
+        <a:solidFill>
+          <a:srgbClr val="FFFFFF"/>
+        </a:solidFill>
+        <a:effectLst/>
+      </p:bgPr>
+    </p:bg>
+    <p:spTree>
+      <p:nvGrpSpPr>
+        <p:cNvPr id="1" name=""/>
+        <p:cNvGrpSpPr/>
+        <p:nvPr/>
+      </p:nvGrpSpPr>
+      <p:grpSpPr/>
+      <p:sp>
+        <p:nvSpPr>
+          <p:cNvPr id="2" name="TextBox 1"/>
+          <p:cNvSpPr txBox="1"/>
+          <p:nvPr/>
+        </p:nvSpPr>
+        <p:spPr>
+          <a:xfrm>
+            <a:off x="640080" y="347472"/>
+            <a:ext cx="10972800" cy="594360"/>
+          </a:xfrm>
+          <a:prstGeom prst="rect">
+            <a:avLst/>
+          </a:prstGeom>
+          <a:noFill/>
+        </p:spPr>
+        <p:txBody>
+          <a:bodyPr wrap="none">
+            <a:spAutoFit/>
+          </a:bodyPr>
+          <a:lstStyle/>
+          <a:p>
+            <a:pPr>
+              <a:defRPr sz="2600" b="1">
+                <a:solidFill>
+                  <a:srgbClr val="500000"/>
+                </a:solidFill>
+              </a:defRPr>
+            </a:pPr>
+            <a:r>
+              <a:t>Pre-Test Field Checklist (Highlights)</a:t>
+            </a:r>
+          </a:p>
+        </p:txBody>
+      </p:sp>
+      <p:sp>
+        <p:nvSpPr>
+          <p:cNvPr id="3" name="TextBox 2"/>
+          <p:cNvSpPr txBox="1"/>
+          <p:nvPr/>
+        </p:nvSpPr>
+        <p:spPr>
+          <a:xfrm>
+            <a:off x="640080" y="868680"/>
+            <a:ext cx="10972800" cy="365760"/>
+          </a:xfrm>
+          <a:prstGeom prst="rect">
+            <a:avLst/>
+          </a:prstGeom>
+          <a:noFill/>
+        </p:spPr>
+        <p:txBody>
+          <a:bodyPr wrap="none">
+            <a:spAutoFit/>
+          </a:bodyPr>
+          <a:lstStyle/>
+          <a:p>
+            <a:pPr>
+              <a:defRPr sz="1300">
+                <a:solidFill>
+                  <a:srgbClr val="64748B"/>
+                </a:solidFill>
+              </a:defRPr>
+            </a:pPr>
+            <a:r>
+              <a:t>Section 4.1 of Maintenance Strategy</a:t>
+            </a:r>
+          </a:p>
+        </p:txBody>
+      </p:sp>
+      <p:sp>
+        <p:nvSpPr>
+          <p:cNvPr id="4" name="Rectangle 3"/>
+          <p:cNvSpPr/>
+          <p:nvPr/>
+        </p:nvSpPr>
+        <p:spPr>
+          <a:xfrm>
+            <a:off x="640080" y="1234440"/>
+            <a:ext cx="10881360" cy="27432"/>
+          </a:xfrm>
+          <a:prstGeom prst="rect">
+            <a:avLst/>
+          </a:prstGeom>
+          <a:solidFill>
+            <a:srgbClr val="B83A3A"/>
+          </a:solidFill>
+          <a:ln>
+            <a:noFill/>
+          </a:ln>
+        </p:spPr>
+        <p:style>
+          <a:lnRef idx="1">
+            <a:schemeClr val="accent1"/>
+          </a:lnRef>
+          <a:fillRef idx="3">
+            <a:schemeClr val="accent1"/>
+          </a:fillRef>
+          <a:effectRef idx="2">
+            <a:schemeClr val="accent1"/>
+          </a:effectRef>
+          <a:fontRef idx="minor">
+            <a:schemeClr val="lt1"/>
+          </a:fontRef>
+        </p:style>
+        <p:txBody>
+          <a:bodyPr rtlCol="0" anchor="ctr"/>
+          <a:lstStyle/>
+          <a:p>
+            <a:pPr algn="ctr"/>
+          </a:p>
+        </p:txBody>
+      </p:sp>
+      <p:sp>
+        <p:nvSpPr>
+          <p:cNvPr id="5" name="TextBox 4"/>
+          <p:cNvSpPr txBox="1"/>
+          <p:nvPr/>
+        </p:nvSpPr>
+        <p:spPr>
+          <a:xfrm>
+            <a:off x="777240" y="1417320"/>
+            <a:ext cx="10881360" cy="5303520"/>
+          </a:xfrm>
+          <a:prstGeom prst="rect">
+            <a:avLst/>
+          </a:prstGeom>
+          <a:noFill/>
+        </p:spPr>
+        <p:txBody>
+          <a:bodyPr wrap="square">
+            <a:spAutoFit/>
+          </a:bodyPr>
+          <a:lstStyle/>
+          <a:p>
+            <a:pPr>
+              <a:spcAft>
+                <a:spcPts val="800"/>
+              </a:spcAft>
+              <a:defRPr sz="1700">
+                <a:solidFill>
+                  <a:srgbClr val="1E293B"/>
+                </a:solidFill>
+              </a:defRPr>
+            </a:pPr>
+            <a:r>
+              <a:t>Valve body/bonnet — no active corrosion or mechanical damage</a:t>
+            </a:r>
+          </a:p>
+          <a:p>
+            <a:pPr>
+              <a:spcAft>
+                <a:spcPts val="800"/>
+              </a:spcAft>
+              <a:defRPr sz="1700">
+                <a:solidFill>
+                  <a:srgbClr val="1E293B"/>
+                </a:solidFill>
+              </a:defRPr>
+            </a:pPr>
+            <a:r>
+              <a:t>Discharge stack — clear, supported, no standing water</a:t>
+            </a:r>
+          </a:p>
+          <a:p>
+            <a:pPr>
+              <a:spcAft>
+                <a:spcPts val="800"/>
+              </a:spcAft>
+              <a:defRPr sz="1700">
+                <a:solidFill>
+                  <a:srgbClr val="1E293B"/>
+                </a:solidFill>
+              </a:defRPr>
+            </a:pPr>
+            <a:r>
+              <a:t>Nameplate legible — record set pressure, serial, orifice, manufacture year</a:t>
+            </a:r>
+          </a:p>
+          <a:p>
+            <a:pPr>
+              <a:spcAft>
+                <a:spcPts val="800"/>
+              </a:spcAft>
+              <a:defRPr sz="1700">
+                <a:solidFill>
+                  <a:srgbClr val="1E293B"/>
+                </a:solidFill>
+              </a:defRPr>
+            </a:pPr>
+            <a:r>
+              <a:t>No seat weeping at inlet; lifting lever free if equipped</a:t>
+            </a:r>
+          </a:p>
+          <a:p>
+            <a:pPr>
+              <a:spcAft>
+                <a:spcPts val="800"/>
+              </a:spcAft>
+              <a:defRPr sz="1700">
+                <a:solidFill>
+                  <a:srgbClr val="1E293B"/>
+                </a:solidFill>
+              </a:defRPr>
+            </a:pPr>
+            <a:r>
+              <a:t>Confirm valve not inadvertently isolated</a:t>
+            </a:r>
+          </a:p>
+          <a:p>
+            <a:pPr>
+              <a:spcAft>
+                <a:spcPts val="800"/>
+              </a:spcAft>
+              <a:defRPr sz="1700">
+                <a:solidFill>
+                  <a:srgbClr val="1E293B"/>
+                </a:solidFill>
+              </a:defRPr>
+            </a:pPr>
+            <a:r>
+              <a:t>Checklist completed before every removal or in-place test — filed in CMMS work order</a:t>
             </a:r>
           </a:p>
         </p:txBody>
@@ -4051,8 +5309,8 @@
         </p:nvSpPr>
         <p:spPr>
           <a:xfrm>
-            <a:off x="640080" y="365760"/>
-            <a:ext cx="10972800" cy="640080"/>
+            <a:off x="640080" y="347472"/>
+            <a:ext cx="10972800" cy="594360"/>
           </a:xfrm>
           <a:prstGeom prst="rect">
             <a:avLst/>
@@ -4073,7 +5331,7 @@
               </a:defRPr>
             </a:pPr>
             <a:r>
-              <a:t>Purpose</a:t>
+              <a:t>Executive Summary</a:t>
             </a:r>
           </a:p>
         </p:txBody>
@@ -4129,8 +5387,8 @@
         </p:nvSpPr>
         <p:spPr>
           <a:xfrm>
-            <a:off x="822960" y="1188720"/>
-            <a:ext cx="10789920" cy="5212080"/>
+            <a:off x="777240" y="1188720"/>
+            <a:ext cx="10881360" cy="5303520"/>
           </a:xfrm>
           <a:prstGeom prst="rect">
             <a:avLst/>
@@ -4145,7 +5403,7 @@
           <a:p>
             <a:pPr>
               <a:spcAft>
-                <a:spcPts val="1000"/>
+                <a:spcPts val="800"/>
               </a:spcAft>
               <a:defRPr sz="1800">
                 <a:solidFill>
@@ -4154,13 +5412,13 @@
               </a:defRPr>
             </a:pPr>
             <a:r>
-              <a:t>Track every Pressure Safety Valve (PSV) across the plant in one place</a:t>
-            </a:r>
-          </a:p>
-          <a:p>
-            <a:pPr>
-              <a:spcAft>
-                <a:spcPts val="1000"/>
+              <a:t>Built an end-to-end Steam Safety Management Program for UES boiler and steam systems</a:t>
+            </a:r>
+          </a:p>
+          <a:p>
+            <a:pPr>
+              <a:spcAft>
+                <a:spcPts val="800"/>
               </a:spcAft>
               <a:defRPr sz="1800">
                 <a:solidFill>
@@ -4169,13 +5427,13 @@
               </a:defRPr>
             </a:pPr>
             <a:r>
-              <a:t>Know which valves are installed, in inventory, or out for service</a:t>
-            </a:r>
-          </a:p>
-          <a:p>
-            <a:pPr>
-              <a:spcAft>
-                <a:spcPts val="1000"/>
+              <a:t>Started with field verification — walking units, photographing nameplates, confirming installed valves</a:t>
+            </a:r>
+          </a:p>
+          <a:p>
+            <a:pPr>
+              <a:spcAft>
+                <a:spcPts val="800"/>
               </a:spcAft>
               <a:defRPr sz="1800">
                 <a:solidFill>
@@ -4184,13 +5442,13 @@
               </a:defRPr>
             </a:pPr>
             <a:r>
-              <a:t>Automatically calculate 3-year recertification due dates</a:t>
-            </a:r>
-          </a:p>
-          <a:p>
-            <a:pPr>
-              <a:spcAft>
-                <a:spcPts val="1000"/>
+              <a:t>Organized findings into a master Excel register, then a live compliance dashboard</a:t>
+            </a:r>
+          </a:p>
+          <a:p>
+            <a:pPr>
+              <a:spcAft>
+                <a:spcPts val="800"/>
               </a:spcAft>
               <a:defRPr sz="1800">
                 <a:solidFill>
@@ -4199,13 +5457,13 @@
               </a:defRPr>
             </a:pPr>
             <a:r>
-              <a:t>Surface overdue and upcoming-due valves before compliance gaps</a:t>
-            </a:r>
-          </a:p>
-          <a:p>
-            <a:pPr>
-              <a:spcAft>
-                <a:spcPts val="1000"/>
+              <a:t>Authored a formal PSV/SRV Maintenance Strategy aligned to ASME, NBIC, API RP 576, and Texas code</a:t>
+            </a:r>
+          </a:p>
+          <a:p>
+            <a:pPr>
+              <a:spcAft>
+                <a:spcPts val="800"/>
               </a:spcAft>
               <a:defRPr sz="1800">
                 <a:solidFill>
@@ -4214,7 +5472,1583 @@
               </a:defRPr>
             </a:pPr>
             <a:r>
-              <a:t>Single source of truth for audits, swaps, and Excel reporting</a:t>
+              <a:t>Outcome: one reliable system of record, proactive due-date management, and a defendable maintenance program</a:t>
+            </a:r>
+          </a:p>
+        </p:txBody>
+      </p:sp>
+    </p:spTree>
+  </p:cSld>
+  <p:clrMapOvr>
+    <a:masterClrMapping/>
+  </p:clrMapOvr>
+</p:sld>
+</file>
+
+<file path=ppt/slides/slide20.xml><?xml version="1.0" encoding="utf-8"?>
+<p:sld xmlns:a="http://schemas.openxmlformats.org/drawingml/2006/main" xmlns:p="http://schemas.openxmlformats.org/presentationml/2006/main" xmlns:r="http://schemas.openxmlformats.org/officeDocument/2006/relationships">
+  <p:cSld>
+    <p:bg>
+      <p:bgPr>
+        <a:solidFill>
+          <a:srgbClr val="FFFFFF"/>
+        </a:solidFill>
+        <a:effectLst/>
+      </p:bgPr>
+    </p:bg>
+    <p:spTree>
+      <p:nvGrpSpPr>
+        <p:cNvPr id="1" name=""/>
+        <p:cNvGrpSpPr/>
+        <p:nvPr/>
+      </p:nvGrpSpPr>
+      <p:grpSpPr/>
+      <p:sp>
+        <p:nvSpPr>
+          <p:cNvPr id="2" name="TextBox 1"/>
+          <p:cNvSpPr txBox="1"/>
+          <p:nvPr/>
+        </p:nvSpPr>
+        <p:spPr>
+          <a:xfrm>
+            <a:off x="640080" y="347472"/>
+            <a:ext cx="10972800" cy="594360"/>
+          </a:xfrm>
+          <a:prstGeom prst="rect">
+            <a:avLst/>
+          </a:prstGeom>
+          <a:noFill/>
+        </p:spPr>
+        <p:txBody>
+          <a:bodyPr wrap="none">
+            <a:spAutoFit/>
+          </a:bodyPr>
+          <a:lstStyle/>
+          <a:p>
+            <a:pPr>
+              <a:defRPr sz="2600" b="1">
+                <a:solidFill>
+                  <a:srgbClr val="500000"/>
+                </a:solidFill>
+              </a:defRPr>
+            </a:pPr>
+            <a:r>
+              <a:t>Valve Identification &amp; Labeling System</a:t>
+            </a:r>
+          </a:p>
+        </p:txBody>
+      </p:sp>
+      <p:sp>
+        <p:nvSpPr>
+          <p:cNvPr id="3" name="TextBox 2"/>
+          <p:cNvSpPr txBox="1"/>
+          <p:nvPr/>
+        </p:nvSpPr>
+        <p:spPr>
+          <a:xfrm>
+            <a:off x="640080" y="868680"/>
+            <a:ext cx="10972800" cy="365760"/>
+          </a:xfrm>
+          <a:prstGeom prst="rect">
+            <a:avLst/>
+          </a:prstGeom>
+          <a:noFill/>
+        </p:spPr>
+        <p:txBody>
+          <a:bodyPr wrap="none">
+            <a:spAutoFit/>
+          </a:bodyPr>
+          <a:lstStyle/>
+          <a:p>
+            <a:pPr>
+              <a:defRPr sz="1300">
+                <a:solidFill>
+                  <a:srgbClr val="64748B"/>
+                </a:solidFill>
+              </a:defRPr>
+            </a:pPr>
+            <a:r>
+              <a:t>Section 8 of Maintenance Strategy</a:t>
+            </a:r>
+          </a:p>
+        </p:txBody>
+      </p:sp>
+      <p:sp>
+        <p:nvSpPr>
+          <p:cNvPr id="4" name="Rectangle 3"/>
+          <p:cNvSpPr/>
+          <p:nvPr/>
+        </p:nvSpPr>
+        <p:spPr>
+          <a:xfrm>
+            <a:off x="640080" y="1234440"/>
+            <a:ext cx="10881360" cy="27432"/>
+          </a:xfrm>
+          <a:prstGeom prst="rect">
+            <a:avLst/>
+          </a:prstGeom>
+          <a:solidFill>
+            <a:srgbClr val="B83A3A"/>
+          </a:solidFill>
+          <a:ln>
+            <a:noFill/>
+          </a:ln>
+        </p:spPr>
+        <p:style>
+          <a:lnRef idx="1">
+            <a:schemeClr val="accent1"/>
+          </a:lnRef>
+          <a:fillRef idx="3">
+            <a:schemeClr val="accent1"/>
+          </a:fillRef>
+          <a:effectRef idx="2">
+            <a:schemeClr val="accent1"/>
+          </a:effectRef>
+          <a:fontRef idx="minor">
+            <a:schemeClr val="lt1"/>
+          </a:fontRef>
+        </p:style>
+        <p:txBody>
+          <a:bodyPr rtlCol="0" anchor="ctr"/>
+          <a:lstStyle/>
+          <a:p>
+            <a:pPr algn="ctr"/>
+          </a:p>
+        </p:txBody>
+      </p:sp>
+      <p:sp>
+        <p:nvSpPr>
+          <p:cNvPr id="5" name="TextBox 4"/>
+          <p:cNvSpPr txBox="1"/>
+          <p:nvPr/>
+        </p:nvSpPr>
+        <p:spPr>
+          <a:xfrm>
+            <a:off x="777240" y="1417320"/>
+            <a:ext cx="10881360" cy="5303520"/>
+          </a:xfrm>
+          <a:prstGeom prst="rect">
+            <a:avLst/>
+          </a:prstGeom>
+          <a:noFill/>
+        </p:spPr>
+        <p:txBody>
+          <a:bodyPr wrap="square">
+            <a:spAutoFit/>
+          </a:bodyPr>
+          <a:lstStyle/>
+          <a:p>
+            <a:pPr>
+              <a:spcAft>
+                <a:spcPts val="800"/>
+              </a:spcAft>
+              <a:defRPr sz="1700">
+                <a:solidFill>
+                  <a:srgbClr val="1E293B"/>
+                </a:solidFill>
+              </a:defRPr>
+            </a:pPr>
+            <a:r>
+              <a:t>Position Tag (fixed point): EQUIPMENT – LOCATION – SERVICE – VALVE TYPE – SEQUENCE</a:t>
+            </a:r>
+          </a:p>
+          <a:p>
+            <a:pPr>
+              <a:spcAft>
+                <a:spcPts val="800"/>
+              </a:spcAft>
+              <a:defRPr sz="1700">
+                <a:solidFill>
+                  <a:srgbClr val="1E293B"/>
+                </a:solidFill>
+              </a:defRPr>
+            </a:pPr>
+            <a:r>
+              <a:t>Example: B012-SD-STM-SV-001B (Boiler B012, Steam Drum, Steam service, Safety Valve, point 001B)</a:t>
+            </a:r>
+          </a:p>
+          <a:p>
+            <a:pPr>
+              <a:spcAft>
+                <a:spcPts val="800"/>
+              </a:spcAft>
+              <a:defRPr sz="1700">
+                <a:solidFill>
+                  <a:srgbClr val="1E293B"/>
+                </a:solidFill>
+              </a:defRPr>
+            </a:pPr>
+            <a:r>
+              <a:t>Inventory ID — warehouse/stock identifier used on physical tags and in dashboard</a:t>
+            </a:r>
+          </a:p>
+          <a:p>
+            <a:pPr>
+              <a:spcAft>
+                <a:spcPts val="800"/>
+              </a:spcAft>
+              <a:defRPr sz="1700">
+                <a:solidFill>
+                  <a:srgbClr val="1E293B"/>
+                </a:solidFill>
+              </a:defRPr>
+            </a:pPr>
+            <a:r>
+              <a:t>Physical two-sided tag on valve body: Position Tag, service, inventory ID, location, serial number</a:t>
+            </a:r>
+          </a:p>
+          <a:p>
+            <a:pPr>
+              <a:spcAft>
+                <a:spcPts val="800"/>
+              </a:spcAft>
+              <a:defRPr sz="1700">
+                <a:solidFill>
+                  <a:srgbClr val="1E293B"/>
+                </a:solidFill>
+              </a:defRPr>
+            </a:pPr>
+            <a:r>
+              <a:t>Links field equipment to CMMS, Setpoint paperwork, dashboard, and spare pool tracking</a:t>
+            </a:r>
+          </a:p>
+        </p:txBody>
+      </p:sp>
+    </p:spTree>
+  </p:cSld>
+  <p:clrMapOvr>
+    <a:masterClrMapping/>
+  </p:clrMapOvr>
+</p:sld>
+</file>
+
+<file path=ppt/slides/slide21.xml><?xml version="1.0" encoding="utf-8"?>
+<p:sld xmlns:a="http://schemas.openxmlformats.org/drawingml/2006/main" xmlns:p="http://schemas.openxmlformats.org/presentationml/2006/main" xmlns:r="http://schemas.openxmlformats.org/officeDocument/2006/relationships">
+  <p:cSld>
+    <p:bg>
+      <p:bgPr>
+        <a:solidFill>
+          <a:srgbClr val="FFFFFF"/>
+        </a:solidFill>
+        <a:effectLst/>
+      </p:bgPr>
+    </p:bg>
+    <p:spTree>
+      <p:nvGrpSpPr>
+        <p:cNvPr id="1" name=""/>
+        <p:cNvGrpSpPr/>
+        <p:nvPr/>
+      </p:nvGrpSpPr>
+      <p:grpSpPr/>
+      <p:sp>
+        <p:nvSpPr>
+          <p:cNvPr id="2" name="TextBox 1"/>
+          <p:cNvSpPr txBox="1"/>
+          <p:nvPr/>
+        </p:nvSpPr>
+        <p:spPr>
+          <a:xfrm>
+            <a:off x="640080" y="347472"/>
+            <a:ext cx="10972800" cy="594360"/>
+          </a:xfrm>
+          <a:prstGeom prst="rect">
+            <a:avLst/>
+          </a:prstGeom>
+          <a:noFill/>
+        </p:spPr>
+        <p:txBody>
+          <a:bodyPr wrap="none">
+            <a:spAutoFit/>
+          </a:bodyPr>
+          <a:lstStyle/>
+          <a:p>
+            <a:pPr>
+              <a:defRPr sz="2600" b="1">
+                <a:solidFill>
+                  <a:srgbClr val="500000"/>
+                </a:solidFill>
+              </a:defRPr>
+            </a:pPr>
+            <a:r>
+              <a:t>Overhaul vs. Repair vs. Replace</a:t>
+            </a:r>
+          </a:p>
+        </p:txBody>
+      </p:sp>
+      <p:sp>
+        <p:nvSpPr>
+          <p:cNvPr id="3" name="Rectangle 2"/>
+          <p:cNvSpPr/>
+          <p:nvPr/>
+        </p:nvSpPr>
+        <p:spPr>
+          <a:xfrm>
+            <a:off x="640080" y="960120"/>
+            <a:ext cx="10881360" cy="27432"/>
+          </a:xfrm>
+          <a:prstGeom prst="rect">
+            <a:avLst/>
+          </a:prstGeom>
+          <a:solidFill>
+            <a:srgbClr val="B83A3A"/>
+          </a:solidFill>
+          <a:ln>
+            <a:noFill/>
+          </a:ln>
+        </p:spPr>
+        <p:style>
+          <a:lnRef idx="1">
+            <a:schemeClr val="accent1"/>
+          </a:lnRef>
+          <a:fillRef idx="3">
+            <a:schemeClr val="accent1"/>
+          </a:fillRef>
+          <a:effectRef idx="2">
+            <a:schemeClr val="accent1"/>
+          </a:effectRef>
+          <a:fontRef idx="minor">
+            <a:schemeClr val="lt1"/>
+          </a:fontRef>
+        </p:style>
+        <p:txBody>
+          <a:bodyPr rtlCol="0" anchor="ctr"/>
+          <a:lstStyle/>
+          <a:p>
+            <a:pPr algn="ctr"/>
+          </a:p>
+        </p:txBody>
+      </p:sp>
+      <p:sp>
+        <p:nvSpPr>
+          <p:cNvPr id="4" name="TextBox 3"/>
+          <p:cNvSpPr txBox="1"/>
+          <p:nvPr/>
+        </p:nvSpPr>
+        <p:spPr>
+          <a:xfrm>
+            <a:off x="777240" y="1188720"/>
+            <a:ext cx="10881360" cy="5303520"/>
+          </a:xfrm>
+          <a:prstGeom prst="rect">
+            <a:avLst/>
+          </a:prstGeom>
+          <a:noFill/>
+        </p:spPr>
+        <p:txBody>
+          <a:bodyPr wrap="square">
+            <a:spAutoFit/>
+          </a:bodyPr>
+          <a:lstStyle/>
+          <a:p>
+            <a:pPr>
+              <a:spcAft>
+                <a:spcPts val="800"/>
+              </a:spcAft>
+              <a:defRPr sz="1700">
+                <a:solidFill>
+                  <a:srgbClr val="1E293B"/>
+                </a:solidFill>
+              </a:defRPr>
+            </a:pPr>
+            <a:r>
+              <a:t>Overhaul: full disassembly, seat lapping, spring inspection, certified pop test — bundled with 3-year send-out</a:t>
+            </a:r>
+          </a:p>
+          <a:p>
+            <a:pPr>
+              <a:spcAft>
+                <a:spcPts val="800"/>
+              </a:spcAft>
+              <a:defRPr sz="1700">
+                <a:solidFill>
+                  <a:srgbClr val="1E293B"/>
+                </a:solidFill>
+              </a:defRPr>
+            </a:pPr>
+            <a:r>
+              <a:t>Repair: limited-scope fix (e.g., seat lapping, spring) — must be VR-stamp work with re-test before return</a:t>
+            </a:r>
+          </a:p>
+          <a:p>
+            <a:pPr>
+              <a:spcAft>
+                <a:spcPts val="800"/>
+              </a:spcAft>
+              <a:defRPr sz="1700">
+                <a:solidFill>
+                  <a:srgbClr val="1E293B"/>
+                </a:solidFill>
+              </a:defRPr>
+            </a:pPr>
+            <a:r>
+              <a:t>Replace when: body damage, obsolete design, economics favor new valve, or high-criticality risk</a:t>
+            </a:r>
+          </a:p>
+          <a:p>
+            <a:pPr>
+              <a:spcAft>
+                <a:spcPts val="800"/>
+              </a:spcAft>
+              <a:defRPr sz="1700">
+                <a:solidFill>
+                  <a:srgbClr val="1E293B"/>
+                </a:solidFill>
+              </a:defRPr>
+            </a:pPr>
+            <a:r>
+              <a:t>Spares in storage &gt;5 years: re-test before installation per API RP 576 guidance</a:t>
+            </a:r>
+          </a:p>
+          <a:p>
+            <a:pPr>
+              <a:spcAft>
+                <a:spcPts val="800"/>
+              </a:spcAft>
+              <a:defRPr sz="1700">
+                <a:solidFill>
+                  <a:srgbClr val="1E293B"/>
+                </a:solidFill>
+              </a:defRPr>
+            </a:pPr>
+            <a:r>
+              <a:t>Decision criteria documented so procurement and operations align on the same rules</a:t>
+            </a:r>
+          </a:p>
+        </p:txBody>
+      </p:sp>
+    </p:spTree>
+  </p:cSld>
+  <p:clrMapOvr>
+    <a:masterClrMapping/>
+  </p:clrMapOvr>
+</p:sld>
+</file>
+
+<file path=ppt/slides/slide22.xml><?xml version="1.0" encoding="utf-8"?>
+<p:sld xmlns:a="http://schemas.openxmlformats.org/drawingml/2006/main" xmlns:p="http://schemas.openxmlformats.org/presentationml/2006/main" xmlns:r="http://schemas.openxmlformats.org/officeDocument/2006/relationships">
+  <p:cSld>
+    <p:bg>
+      <p:bgPr>
+        <a:solidFill>
+          <a:srgbClr val="FFFFFF"/>
+        </a:solidFill>
+        <a:effectLst/>
+      </p:bgPr>
+    </p:bg>
+    <p:spTree>
+      <p:nvGrpSpPr>
+        <p:cNvPr id="1" name=""/>
+        <p:cNvGrpSpPr/>
+        <p:nvPr/>
+      </p:nvGrpSpPr>
+      <p:grpSpPr/>
+      <p:sp>
+        <p:nvSpPr>
+          <p:cNvPr id="2" name="TextBox 1"/>
+          <p:cNvSpPr txBox="1"/>
+          <p:nvPr/>
+        </p:nvSpPr>
+        <p:spPr>
+          <a:xfrm>
+            <a:off x="640080" y="347472"/>
+            <a:ext cx="10972800" cy="594360"/>
+          </a:xfrm>
+          <a:prstGeom prst="rect">
+            <a:avLst/>
+          </a:prstGeom>
+          <a:noFill/>
+        </p:spPr>
+        <p:txBody>
+          <a:bodyPr wrap="none">
+            <a:spAutoFit/>
+          </a:bodyPr>
+          <a:lstStyle/>
+          <a:p>
+            <a:pPr>
+              <a:defRPr sz="2600" b="1">
+                <a:solidFill>
+                  <a:srgbClr val="500000"/>
+                </a:solidFill>
+              </a:defRPr>
+            </a:pPr>
+            <a:r>
+              <a:t>Commercial 125 psi Boiler Strategy</a:t>
+            </a:r>
+          </a:p>
+        </p:txBody>
+      </p:sp>
+      <p:sp>
+        <p:nvSpPr>
+          <p:cNvPr id="3" name="TextBox 2"/>
+          <p:cNvSpPr txBox="1"/>
+          <p:nvPr/>
+        </p:nvSpPr>
+        <p:spPr>
+          <a:xfrm>
+            <a:off x="640080" y="868680"/>
+            <a:ext cx="10972800" cy="365760"/>
+          </a:xfrm>
+          <a:prstGeom prst="rect">
+            <a:avLst/>
+          </a:prstGeom>
+          <a:noFill/>
+        </p:spPr>
+        <p:txBody>
+          <a:bodyPr wrap="none">
+            <a:spAutoFit/>
+          </a:bodyPr>
+          <a:lstStyle/>
+          <a:p>
+            <a:pPr>
+              <a:defRPr sz="1300">
+                <a:solidFill>
+                  <a:srgbClr val="64748B"/>
+                </a:solidFill>
+              </a:defRPr>
+            </a:pPr>
+            <a:r>
+              <a:t>Section 7 of Maintenance Strategy — management decision framework</a:t>
+            </a:r>
+          </a:p>
+        </p:txBody>
+      </p:sp>
+      <p:sp>
+        <p:nvSpPr>
+          <p:cNvPr id="4" name="Rectangle 3"/>
+          <p:cNvSpPr/>
+          <p:nvPr/>
+        </p:nvSpPr>
+        <p:spPr>
+          <a:xfrm>
+            <a:off x="640080" y="1234440"/>
+            <a:ext cx="10881360" cy="27432"/>
+          </a:xfrm>
+          <a:prstGeom prst="rect">
+            <a:avLst/>
+          </a:prstGeom>
+          <a:solidFill>
+            <a:srgbClr val="B83A3A"/>
+          </a:solidFill>
+          <a:ln>
+            <a:noFill/>
+          </a:ln>
+        </p:spPr>
+        <p:style>
+          <a:lnRef idx="1">
+            <a:schemeClr val="accent1"/>
+          </a:lnRef>
+          <a:fillRef idx="3">
+            <a:schemeClr val="accent1"/>
+          </a:fillRef>
+          <a:effectRef idx="2">
+            <a:schemeClr val="accent1"/>
+          </a:effectRef>
+          <a:fontRef idx="minor">
+            <a:schemeClr val="lt1"/>
+          </a:fontRef>
+        </p:style>
+        <p:txBody>
+          <a:bodyPr rtlCol="0" anchor="ctr"/>
+          <a:lstStyle/>
+          <a:p>
+            <a:pPr algn="ctr"/>
+          </a:p>
+        </p:txBody>
+      </p:sp>
+      <p:sp>
+        <p:nvSpPr>
+          <p:cNvPr id="5" name="TextBox 4"/>
+          <p:cNvSpPr txBox="1"/>
+          <p:nvPr/>
+        </p:nvSpPr>
+        <p:spPr>
+          <a:xfrm>
+            <a:off x="777240" y="1417320"/>
+            <a:ext cx="10881360" cy="5303520"/>
+          </a:xfrm>
+          <a:prstGeom prst="rect">
+            <a:avLst/>
+          </a:prstGeom>
+          <a:noFill/>
+        </p:spPr>
+        <p:txBody>
+          <a:bodyPr wrap="square">
+            <a:spAutoFit/>
+          </a:bodyPr>
+          <a:lstStyle/>
+          <a:p>
+            <a:pPr>
+              <a:spcAft>
+                <a:spcPts val="800"/>
+              </a:spcAft>
+              <a:defRPr sz="1700">
+                <a:solidFill>
+                  <a:srgbClr val="1E293B"/>
+                </a:solidFill>
+              </a:defRPr>
+            </a:pPr>
+            <a:r>
+              <a:t>Current practice: replace-and-discard (~16+ valves/year) — simple but recurring cost</a:t>
+            </a:r>
+          </a:p>
+          <a:p>
+            <a:pPr>
+              <a:spcAft>
+                <a:spcPts val="800"/>
+              </a:spcAft>
+              <a:defRPr sz="1700">
+                <a:solidFill>
+                  <a:srgbClr val="1E293B"/>
+                </a:solidFill>
+              </a:defRPr>
+            </a:pPr>
+            <a:r>
+              <a:t>Alternative: test-and-reuse with a shared spare pool — mirrors high-pressure boiler program</a:t>
+            </a:r>
+          </a:p>
+          <a:p>
+            <a:pPr>
+              <a:spcAft>
+                <a:spcPts val="800"/>
+              </a:spcAft>
+              <a:defRPr sz="1700">
+                <a:solidFill>
+                  <a:srgbClr val="1E293B"/>
+                </a:solidFill>
+              </a:defRPr>
+            </a:pPr>
+            <a:r>
+              <a:t>Illustrative savings: ~40% unit-cost reduction after pool is built (pending actual quotes)</a:t>
+            </a:r>
+          </a:p>
+          <a:p>
+            <a:pPr>
+              <a:spcAft>
+                <a:spcPts val="800"/>
+              </a:spcAft>
+              <a:defRPr sz="1700">
+                <a:solidFill>
+                  <a:srgbClr val="1E293B"/>
+                </a:solidFill>
+              </a:defRPr>
+            </a:pPr>
+            <a:r>
+              <a:t>Staggered 3-year rotation groups spread workload and cost evenly across years</a:t>
+            </a:r>
+          </a:p>
+          <a:p>
+            <a:pPr>
+              <a:spcAft>
+                <a:spcPts val="800"/>
+              </a:spcAft>
+              <a:defRPr sz="1700">
+                <a:solidFill>
+                  <a:srgbClr val="1E293B"/>
+                </a:solidFill>
+              </a:defRPr>
+            </a:pPr>
+            <a:r>
+              <a:t>Variability pooling: shared spare inventory covers more locations than one spare per site</a:t>
+            </a:r>
+          </a:p>
+          <a:p>
+            <a:pPr>
+              <a:spcAft>
+                <a:spcPts val="800"/>
+              </a:spcAft>
+              <a:defRPr sz="1700">
+                <a:solidFill>
+                  <a:srgbClr val="1E293B"/>
+                </a:solidFill>
+              </a:defRPr>
+            </a:pPr>
+            <a:r>
+              <a:t>Recommendation: pilot on 3–5 valves, validate costs and turnaround before fleet-wide change</a:t>
+            </a:r>
+          </a:p>
+        </p:txBody>
+      </p:sp>
+    </p:spTree>
+  </p:cSld>
+  <p:clrMapOvr>
+    <a:masterClrMapping/>
+  </p:clrMapOvr>
+</p:sld>
+</file>
+
+<file path=ppt/slides/slide23.xml><?xml version="1.0" encoding="utf-8"?>
+<p:sld xmlns:a="http://schemas.openxmlformats.org/drawingml/2006/main" xmlns:p="http://schemas.openxmlformats.org/presentationml/2006/main" xmlns:r="http://schemas.openxmlformats.org/officeDocument/2006/relationships">
+  <p:cSld>
+    <p:bg>
+      <p:bgPr>
+        <a:solidFill>
+          <a:srgbClr val="FFFFFF"/>
+        </a:solidFill>
+        <a:effectLst/>
+      </p:bgPr>
+    </p:bg>
+    <p:spTree>
+      <p:nvGrpSpPr>
+        <p:cNvPr id="1" name=""/>
+        <p:cNvGrpSpPr/>
+        <p:nvPr/>
+      </p:nvGrpSpPr>
+      <p:grpSpPr/>
+      <p:sp>
+        <p:nvSpPr>
+          <p:cNvPr id="2" name="TextBox 1"/>
+          <p:cNvSpPr txBox="1"/>
+          <p:nvPr/>
+        </p:nvSpPr>
+        <p:spPr>
+          <a:xfrm>
+            <a:off x="640080" y="347472"/>
+            <a:ext cx="10972800" cy="594360"/>
+          </a:xfrm>
+          <a:prstGeom prst="rect">
+            <a:avLst/>
+          </a:prstGeom>
+          <a:noFill/>
+        </p:spPr>
+        <p:txBody>
+          <a:bodyPr wrap="none">
+            <a:spAutoFit/>
+          </a:bodyPr>
+          <a:lstStyle/>
+          <a:p>
+            <a:pPr>
+              <a:defRPr sz="2600" b="1">
+                <a:solidFill>
+                  <a:srgbClr val="500000"/>
+                </a:solidFill>
+              </a:defRPr>
+            </a:pPr>
+            <a:r>
+              <a:t>Highest-Impact Program Improvements</a:t>
+            </a:r>
+          </a:p>
+        </p:txBody>
+      </p:sp>
+      <p:sp>
+        <p:nvSpPr>
+          <p:cNvPr id="3" name="Rectangle 2"/>
+          <p:cNvSpPr/>
+          <p:nvPr/>
+        </p:nvSpPr>
+        <p:spPr>
+          <a:xfrm>
+            <a:off x="640080" y="960120"/>
+            <a:ext cx="10881360" cy="27432"/>
+          </a:xfrm>
+          <a:prstGeom prst="rect">
+            <a:avLst/>
+          </a:prstGeom>
+          <a:solidFill>
+            <a:srgbClr val="B83A3A"/>
+          </a:solidFill>
+          <a:ln>
+            <a:noFill/>
+          </a:ln>
+        </p:spPr>
+        <p:style>
+          <a:lnRef idx="1">
+            <a:schemeClr val="accent1"/>
+          </a:lnRef>
+          <a:fillRef idx="3">
+            <a:schemeClr val="accent1"/>
+          </a:fillRef>
+          <a:effectRef idx="2">
+            <a:schemeClr val="accent1"/>
+          </a:effectRef>
+          <a:fontRef idx="minor">
+            <a:schemeClr val="lt1"/>
+          </a:fontRef>
+        </p:style>
+        <p:txBody>
+          <a:bodyPr rtlCol="0" anchor="ctr"/>
+          <a:lstStyle/>
+          <a:p>
+            <a:pPr algn="ctr"/>
+          </a:p>
+        </p:txBody>
+      </p:sp>
+      <p:sp>
+        <p:nvSpPr>
+          <p:cNvPr id="4" name="TextBox 3"/>
+          <p:cNvSpPr txBox="1"/>
+          <p:nvPr/>
+        </p:nvSpPr>
+        <p:spPr>
+          <a:xfrm>
+            <a:off x="777240" y="1188720"/>
+            <a:ext cx="10881360" cy="5303520"/>
+          </a:xfrm>
+          <a:prstGeom prst="rect">
+            <a:avLst/>
+          </a:prstGeom>
+          <a:noFill/>
+        </p:spPr>
+        <p:txBody>
+          <a:bodyPr wrap="square">
+            <a:spAutoFit/>
+          </a:bodyPr>
+          <a:lstStyle/>
+          <a:p>
+            <a:pPr>
+              <a:spcAft>
+                <a:spcPts val="800"/>
+              </a:spcAft>
+              <a:defRPr sz="1700">
+                <a:solidFill>
+                  <a:srgbClr val="1E293B"/>
+                </a:solidFill>
+              </a:defRPr>
+            </a:pPr>
+            <a:r>
+              <a:t>Acquire spares for valves currently without a designated spare — enables full bench testing</a:t>
+            </a:r>
+          </a:p>
+          <a:p>
+            <a:pPr>
+              <a:spcAft>
+                <a:spcPts val="800"/>
+              </a:spcAft>
+              <a:defRPr sz="1700">
+                <a:solidFill>
+                  <a:srgbClr val="1E293B"/>
+                </a:solidFill>
+              </a:defRPr>
+            </a:pPr>
+            <a:r>
+              <a:t>Rank valves by criticality (pressure, capacity, consequence of failure) to prioritize capital</a:t>
+            </a:r>
+          </a:p>
+          <a:p>
+            <a:pPr>
+              <a:spcAft>
+                <a:spcPts val="800"/>
+              </a:spcAft>
+              <a:defRPr sz="1700">
+                <a:solidFill>
+                  <a:srgbClr val="1E293B"/>
+                </a:solidFill>
+              </a:defRPr>
+            </a:pPr>
+            <a:r>
+              <a:t>Adopt semi-annual visual walkdowns as standard UES practice between formal tests</a:t>
+            </a:r>
+          </a:p>
+          <a:p>
+            <a:pPr>
+              <a:spcAft>
+                <a:spcPts val="800"/>
+              </a:spcAft>
+              <a:defRPr sz="1700">
+                <a:solidFill>
+                  <a:srgbClr val="1E293B"/>
+                </a:solidFill>
+              </a:defRPr>
+            </a:pPr>
+            <a:r>
+              <a:t>Keep dashboard and master register as the single source of truth for due dates and status</a:t>
+            </a:r>
+          </a:p>
+          <a:p>
+            <a:pPr>
+              <a:spcAft>
+                <a:spcPts val="800"/>
+              </a:spcAft>
+              <a:defRPr sz="1700">
+                <a:solidFill>
+                  <a:srgbClr val="1E293B"/>
+                </a:solidFill>
+              </a:defRPr>
+            </a:pPr>
+            <a:r>
+              <a:t>Management decision needed on routine manual lever testing — risk vs. PG-73.1.3 compliance</a:t>
+            </a:r>
+          </a:p>
+        </p:txBody>
+      </p:sp>
+    </p:spTree>
+  </p:cSld>
+  <p:clrMapOvr>
+    <a:masterClrMapping/>
+  </p:clrMapOvr>
+</p:sld>
+</file>
+
+<file path=ppt/slides/slide24.xml><?xml version="1.0" encoding="utf-8"?>
+<p:sld xmlns:a="http://schemas.openxmlformats.org/drawingml/2006/main" xmlns:p="http://schemas.openxmlformats.org/presentationml/2006/main" xmlns:r="http://schemas.openxmlformats.org/officeDocument/2006/relationships">
+  <p:cSld>
+    <p:bg>
+      <p:bgPr>
+        <a:solidFill>
+          <a:srgbClr val="FFFFFF"/>
+        </a:solidFill>
+        <a:effectLst/>
+      </p:bgPr>
+    </p:bg>
+    <p:spTree>
+      <p:nvGrpSpPr>
+        <p:cNvPr id="1" name=""/>
+        <p:cNvGrpSpPr/>
+        <p:nvPr/>
+      </p:nvGrpSpPr>
+      <p:grpSpPr/>
+      <p:sp>
+        <p:nvSpPr>
+          <p:cNvPr id="2" name="TextBox 1"/>
+          <p:cNvSpPr txBox="1"/>
+          <p:nvPr/>
+        </p:nvSpPr>
+        <p:spPr>
+          <a:xfrm>
+            <a:off x="640080" y="347472"/>
+            <a:ext cx="10972800" cy="594360"/>
+          </a:xfrm>
+          <a:prstGeom prst="rect">
+            <a:avLst/>
+          </a:prstGeom>
+          <a:noFill/>
+        </p:spPr>
+        <p:txBody>
+          <a:bodyPr wrap="none">
+            <a:spAutoFit/>
+          </a:bodyPr>
+          <a:lstStyle/>
+          <a:p>
+            <a:pPr>
+              <a:defRPr sz="2600" b="1">
+                <a:solidFill>
+                  <a:srgbClr val="500000"/>
+                </a:solidFill>
+              </a:defRPr>
+            </a:pPr>
+            <a:r>
+              <a:t>Program Outcomes &amp; Value Delivered</a:t>
+            </a:r>
+          </a:p>
+        </p:txBody>
+      </p:sp>
+      <p:sp>
+        <p:nvSpPr>
+          <p:cNvPr id="3" name="Rectangle 2"/>
+          <p:cNvSpPr/>
+          <p:nvPr/>
+        </p:nvSpPr>
+        <p:spPr>
+          <a:xfrm>
+            <a:off x="640080" y="960120"/>
+            <a:ext cx="10881360" cy="27432"/>
+          </a:xfrm>
+          <a:prstGeom prst="rect">
+            <a:avLst/>
+          </a:prstGeom>
+          <a:solidFill>
+            <a:srgbClr val="B83A3A"/>
+          </a:solidFill>
+          <a:ln>
+            <a:noFill/>
+          </a:ln>
+        </p:spPr>
+        <p:style>
+          <a:lnRef idx="1">
+            <a:schemeClr val="accent1"/>
+          </a:lnRef>
+          <a:fillRef idx="3">
+            <a:schemeClr val="accent1"/>
+          </a:fillRef>
+          <a:effectRef idx="2">
+            <a:schemeClr val="accent1"/>
+          </a:effectRef>
+          <a:fontRef idx="minor">
+            <a:schemeClr val="lt1"/>
+          </a:fontRef>
+        </p:style>
+        <p:txBody>
+          <a:bodyPr rtlCol="0" anchor="ctr"/>
+          <a:lstStyle/>
+          <a:p>
+            <a:pPr algn="ctr"/>
+          </a:p>
+        </p:txBody>
+      </p:sp>
+      <p:sp>
+        <p:nvSpPr>
+          <p:cNvPr id="4" name="TextBox 3"/>
+          <p:cNvSpPr txBox="1"/>
+          <p:nvPr/>
+        </p:nvSpPr>
+        <p:spPr>
+          <a:xfrm>
+            <a:off x="640080" y="1234440"/>
+            <a:ext cx="5303520" cy="320040"/>
+          </a:xfrm>
+          <a:prstGeom prst="rect">
+            <a:avLst/>
+          </a:prstGeom>
+          <a:noFill/>
+        </p:spPr>
+        <p:txBody>
+          <a:bodyPr wrap="none">
+            <a:spAutoFit/>
+          </a:bodyPr>
+          <a:lstStyle/>
+          <a:p>
+            <a:pPr>
+              <a:defRPr sz="1400" b="1">
+                <a:solidFill>
+                  <a:srgbClr val="500000"/>
+                </a:solidFill>
+              </a:defRPr>
+            </a:pPr>
+            <a:r>
+              <a:t>Operational value</a:t>
+            </a:r>
+          </a:p>
+        </p:txBody>
+      </p:sp>
+      <p:sp>
+        <p:nvSpPr>
+          <p:cNvPr id="5" name="TextBox 4"/>
+          <p:cNvSpPr txBox="1"/>
+          <p:nvPr/>
+        </p:nvSpPr>
+        <p:spPr>
+          <a:xfrm>
+            <a:off x="640080" y="1554480"/>
+            <a:ext cx="5394960" cy="4754880"/>
+          </a:xfrm>
+          <a:prstGeom prst="rect">
+            <a:avLst/>
+          </a:prstGeom>
+          <a:noFill/>
+        </p:spPr>
+        <p:txBody>
+          <a:bodyPr wrap="square">
+            <a:spAutoFit/>
+          </a:bodyPr>
+          <a:lstStyle/>
+          <a:p>
+            <a:pPr>
+              <a:spcAft>
+                <a:spcPts val="600"/>
+              </a:spcAft>
+              <a:defRPr sz="1500">
+                <a:solidFill>
+                  <a:srgbClr val="1E293B"/>
+                </a:solidFill>
+              </a:defRPr>
+            </a:pPr>
+            <a:r>
+              <a:t>Complete valve inventory across steam systems</a:t>
+            </a:r>
+          </a:p>
+          <a:p>
+            <a:pPr>
+              <a:spcAft>
+                <a:spcPts val="600"/>
+              </a:spcAft>
+              <a:defRPr sz="1500">
+                <a:solidFill>
+                  <a:srgbClr val="1E293B"/>
+                </a:solidFill>
+              </a:defRPr>
+            </a:pPr>
+            <a:r>
+              <a:t>Visible compliance status by equipment and site</a:t>
+            </a:r>
+          </a:p>
+          <a:p>
+            <a:pPr>
+              <a:spcAft>
+                <a:spcPts val="600"/>
+              </a:spcAft>
+              <a:defRPr sz="1500">
+                <a:solidFill>
+                  <a:srgbClr val="1E293B"/>
+                </a:solidFill>
+              </a:defRPr>
+            </a:pPr>
+            <a:r>
+              <a:t>Traceable history for audits and incidents</a:t>
+            </a:r>
+          </a:p>
+          <a:p>
+            <a:pPr>
+              <a:spcAft>
+                <a:spcPts val="600"/>
+              </a:spcAft>
+              <a:defRPr sz="1500">
+                <a:solidFill>
+                  <a:srgbClr val="1E293B"/>
+                </a:solidFill>
+              </a:defRPr>
+            </a:pPr>
+            <a:r>
+              <a:t>Faster planning for Setpoint outages and swaps</a:t>
+            </a:r>
+          </a:p>
+          <a:p>
+            <a:pPr>
+              <a:spcAft>
+                <a:spcPts val="600"/>
+              </a:spcAft>
+              <a:defRPr sz="1500">
+                <a:solidFill>
+                  <a:srgbClr val="1E293B"/>
+                </a:solidFill>
+              </a:defRPr>
+            </a:pPr>
+            <a:r>
+              <a:t>Reduced reliance on memory and scattered files</a:t>
+            </a:r>
+          </a:p>
+        </p:txBody>
+      </p:sp>
+      <p:sp>
+        <p:nvSpPr>
+          <p:cNvPr id="6" name="TextBox 5"/>
+          <p:cNvSpPr txBox="1"/>
+          <p:nvPr/>
+        </p:nvSpPr>
+        <p:spPr>
+          <a:xfrm>
+            <a:off x="6172200" y="1234440"/>
+            <a:ext cx="5303520" cy="320040"/>
+          </a:xfrm>
+          <a:prstGeom prst="rect">
+            <a:avLst/>
+          </a:prstGeom>
+          <a:noFill/>
+        </p:spPr>
+        <p:txBody>
+          <a:bodyPr wrap="none">
+            <a:spAutoFit/>
+          </a:bodyPr>
+          <a:lstStyle/>
+          <a:p>
+            <a:pPr>
+              <a:defRPr sz="1400" b="1">
+                <a:solidFill>
+                  <a:srgbClr val="500000"/>
+                </a:solidFill>
+              </a:defRPr>
+            </a:pPr>
+            <a:r>
+              <a:t>Strategic value</a:t>
+            </a:r>
+          </a:p>
+        </p:txBody>
+      </p:sp>
+      <p:sp>
+        <p:nvSpPr>
+          <p:cNvPr id="7" name="TextBox 6"/>
+          <p:cNvSpPr txBox="1"/>
+          <p:nvPr/>
+        </p:nvSpPr>
+        <p:spPr>
+          <a:xfrm>
+            <a:off x="6172200" y="1554480"/>
+            <a:ext cx="5394960" cy="4754880"/>
+          </a:xfrm>
+          <a:prstGeom prst="rect">
+            <a:avLst/>
+          </a:prstGeom>
+          <a:noFill/>
+        </p:spPr>
+        <p:txBody>
+          <a:bodyPr wrap="square">
+            <a:spAutoFit/>
+          </a:bodyPr>
+          <a:lstStyle/>
+          <a:p>
+            <a:pPr>
+              <a:spcAft>
+                <a:spcPts val="600"/>
+              </a:spcAft>
+              <a:defRPr sz="1500">
+                <a:solidFill>
+                  <a:srgbClr val="1E293B"/>
+                </a:solidFill>
+              </a:defRPr>
+            </a:pPr>
+            <a:r>
+              <a:t>Code-aligned maintenance strategy document</a:t>
+            </a:r>
+          </a:p>
+          <a:p>
+            <a:pPr>
+              <a:spcAft>
+                <a:spcPts val="600"/>
+              </a:spcAft>
+              <a:defRPr sz="1500">
+                <a:solidFill>
+                  <a:srgbClr val="1E293B"/>
+                </a:solidFill>
+              </a:defRPr>
+            </a:pPr>
+            <a:r>
+              <a:t>Foundation for CMMS integration and spare pooling</a:t>
+            </a:r>
+          </a:p>
+          <a:p>
+            <a:pPr>
+              <a:spcAft>
+                <a:spcPts val="600"/>
+              </a:spcAft>
+              <a:defRPr sz="1500">
+                <a:solidFill>
+                  <a:srgbClr val="1E293B"/>
+                </a:solidFill>
+              </a:defRPr>
+            </a:pPr>
+            <a:r>
+              <a:t>Data to support capital requests for spares</a:t>
+            </a:r>
+          </a:p>
+          <a:p>
+            <a:pPr>
+              <a:spcAft>
+                <a:spcPts val="600"/>
+              </a:spcAft>
+              <a:defRPr sz="1500">
+                <a:solidFill>
+                  <a:srgbClr val="1E293B"/>
+                </a:solidFill>
+              </a:defRPr>
+            </a:pPr>
+            <a:r>
+              <a:t>Leadership-ready reporting via dashboard &amp; Excel</a:t>
+            </a:r>
+          </a:p>
+          <a:p>
+            <a:pPr>
+              <a:spcAft>
+                <a:spcPts val="600"/>
+              </a:spcAft>
+              <a:defRPr sz="1500">
+                <a:solidFill>
+                  <a:srgbClr val="1E293B"/>
+                </a:solidFill>
+              </a:defRPr>
+            </a:pPr>
+            <a:r>
+              <a:t>Sustainable program ownership within UES</a:t>
+            </a:r>
+          </a:p>
+        </p:txBody>
+      </p:sp>
+    </p:spTree>
+  </p:cSld>
+  <p:clrMapOvr>
+    <a:masterClrMapping/>
+  </p:clrMapOvr>
+</p:sld>
+</file>
+
+<file path=ppt/slides/slide25.xml><?xml version="1.0" encoding="utf-8"?>
+<p:sld xmlns:a="http://schemas.openxmlformats.org/drawingml/2006/main" xmlns:p="http://schemas.openxmlformats.org/presentationml/2006/main" xmlns:r="http://schemas.openxmlformats.org/officeDocument/2006/relationships">
+  <p:cSld>
+    <p:bg>
+      <p:bgPr>
+        <a:solidFill>
+          <a:srgbClr val="FFFFFF"/>
+        </a:solidFill>
+        <a:effectLst/>
+      </p:bgPr>
+    </p:bg>
+    <p:spTree>
+      <p:nvGrpSpPr>
+        <p:cNvPr id="1" name=""/>
+        <p:cNvGrpSpPr/>
+        <p:nvPr/>
+      </p:nvGrpSpPr>
+      <p:grpSpPr/>
+      <p:sp>
+        <p:nvSpPr>
+          <p:cNvPr id="2" name="TextBox 1"/>
+          <p:cNvSpPr txBox="1"/>
+          <p:nvPr/>
+        </p:nvSpPr>
+        <p:spPr>
+          <a:xfrm>
+            <a:off x="640080" y="347472"/>
+            <a:ext cx="10972800" cy="594360"/>
+          </a:xfrm>
+          <a:prstGeom prst="rect">
+            <a:avLst/>
+          </a:prstGeom>
+          <a:noFill/>
+        </p:spPr>
+        <p:txBody>
+          <a:bodyPr wrap="none">
+            <a:spAutoFit/>
+          </a:bodyPr>
+          <a:lstStyle/>
+          <a:p>
+            <a:pPr>
+              <a:defRPr sz="2600" b="1">
+                <a:solidFill>
+                  <a:srgbClr val="500000"/>
+                </a:solidFill>
+              </a:defRPr>
+            </a:pPr>
+            <a:r>
+              <a:t>Recommended Next Steps</a:t>
+            </a:r>
+          </a:p>
+        </p:txBody>
+      </p:sp>
+      <p:sp>
+        <p:nvSpPr>
+          <p:cNvPr id="3" name="Rectangle 2"/>
+          <p:cNvSpPr/>
+          <p:nvPr/>
+        </p:nvSpPr>
+        <p:spPr>
+          <a:xfrm>
+            <a:off x="640080" y="960120"/>
+            <a:ext cx="10881360" cy="27432"/>
+          </a:xfrm>
+          <a:prstGeom prst="rect">
+            <a:avLst/>
+          </a:prstGeom>
+          <a:solidFill>
+            <a:srgbClr val="B83A3A"/>
+          </a:solidFill>
+          <a:ln>
+            <a:noFill/>
+          </a:ln>
+        </p:spPr>
+        <p:style>
+          <a:lnRef idx="1">
+            <a:schemeClr val="accent1"/>
+          </a:lnRef>
+          <a:fillRef idx="3">
+            <a:schemeClr val="accent1"/>
+          </a:fillRef>
+          <a:effectRef idx="2">
+            <a:schemeClr val="accent1"/>
+          </a:effectRef>
+          <a:fontRef idx="minor">
+            <a:schemeClr val="lt1"/>
+          </a:fontRef>
+        </p:style>
+        <p:txBody>
+          <a:bodyPr rtlCol="0" anchor="ctr"/>
+          <a:lstStyle/>
+          <a:p>
+            <a:pPr algn="ctr"/>
+          </a:p>
+        </p:txBody>
+      </p:sp>
+      <p:sp>
+        <p:nvSpPr>
+          <p:cNvPr id="4" name="TextBox 3"/>
+          <p:cNvSpPr txBox="1"/>
+          <p:nvPr/>
+        </p:nvSpPr>
+        <p:spPr>
+          <a:xfrm>
+            <a:off x="777240" y="1188720"/>
+            <a:ext cx="10881360" cy="5303520"/>
+          </a:xfrm>
+          <a:prstGeom prst="rect">
+            <a:avLst/>
+          </a:prstGeom>
+          <a:noFill/>
+        </p:spPr>
+        <p:txBody>
+          <a:bodyPr wrap="square">
+            <a:spAutoFit/>
+          </a:bodyPr>
+          <a:lstStyle/>
+          <a:p>
+            <a:pPr>
+              <a:spcAft>
+                <a:spcPts val="800"/>
+              </a:spcAft>
+              <a:defRPr sz="1700">
+                <a:solidFill>
+                  <a:srgbClr val="1E293B"/>
+                </a:solidFill>
+              </a:defRPr>
+            </a:pPr>
+            <a:r>
+              <a:t>Leadership endorsement of the Maintenance Strategy and PM frequencies</a:t>
+            </a:r>
+          </a:p>
+          <a:p>
+            <a:pPr>
+              <a:spcAft>
+                <a:spcPts val="800"/>
+              </a:spcAft>
+              <a:defRPr sz="1700">
+                <a:solidFill>
+                  <a:srgbClr val="1E293B"/>
+                </a:solidFill>
+              </a:defRPr>
+            </a:pPr>
+            <a:r>
+              <a:t>Decision on manual lever testing policy (Section 3 — management choice)</a:t>
+            </a:r>
+          </a:p>
+          <a:p>
+            <a:pPr>
+              <a:spcAft>
+                <a:spcPts val="800"/>
+              </a:spcAft>
+              <a:defRPr sz="1700">
+                <a:solidFill>
+                  <a:srgbClr val="1E293B"/>
+                </a:solidFill>
+              </a:defRPr>
+            </a:pPr>
+            <a:r>
+              <a:t>Approve spare-acquisition prioritization for no-spare locations</a:t>
+            </a:r>
+          </a:p>
+          <a:p>
+            <a:pPr>
+              <a:spcAft>
+                <a:spcPts val="800"/>
+              </a:spcAft>
+              <a:defRPr sz="1700">
+                <a:solidFill>
+                  <a:srgbClr val="1E293B"/>
+                </a:solidFill>
+              </a:defRPr>
+            </a:pPr>
+            <a:r>
+              <a:t>Pilot test-and-reuse for commercial 125 psi valves (Section 7.5)</a:t>
+            </a:r>
+          </a:p>
+          <a:p>
+            <a:pPr>
+              <a:spcAft>
+                <a:spcPts val="800"/>
+              </a:spcAft>
+              <a:defRPr sz="1700">
+                <a:solidFill>
+                  <a:srgbClr val="1E293B"/>
+                </a:solidFill>
+              </a:defRPr>
+            </a:pPr>
+            <a:r>
+              <a:t>Continue populating dashboard with remaining field discoveries</a:t>
+            </a:r>
+          </a:p>
+          <a:p>
+            <a:pPr>
+              <a:spcAft>
+                <a:spcPts val="800"/>
+              </a:spcAft>
+              <a:defRPr sz="1700">
+                <a:solidFill>
+                  <a:srgbClr val="1E293B"/>
+                </a:solidFill>
+              </a:defRPr>
+            </a:pPr>
+            <a:r>
+              <a:t>Integrate Position Tags and Inventory IDs fleet-wide on physical valve tags</a:t>
+            </a:r>
+          </a:p>
+        </p:txBody>
+      </p:sp>
+    </p:spTree>
+  </p:cSld>
+  <p:clrMapOvr>
+    <a:masterClrMapping/>
+  </p:clrMapOvr>
+</p:sld>
+</file>
+
+<file path=ppt/slides/slide26.xml><?xml version="1.0" encoding="utf-8"?>
+<p:sld xmlns:a="http://schemas.openxmlformats.org/drawingml/2006/main" xmlns:p="http://schemas.openxmlformats.org/presentationml/2006/main" xmlns:r="http://schemas.openxmlformats.org/officeDocument/2006/relationships">
+  <p:cSld>
+    <p:bg>
+      <p:bgPr>
+        <a:solidFill>
+          <a:srgbClr val="500000"/>
+        </a:solidFill>
+        <a:effectLst/>
+      </p:bgPr>
+    </p:bg>
+    <p:spTree>
+      <p:nvGrpSpPr>
+        <p:cNvPr id="1" name=""/>
+        <p:cNvGrpSpPr/>
+        <p:nvPr/>
+      </p:nvGrpSpPr>
+      <p:grpSpPr/>
+      <p:sp>
+        <p:nvSpPr>
+          <p:cNvPr id="2" name="TextBox 1"/>
+          <p:cNvSpPr txBox="1"/>
+          <p:nvPr/>
+        </p:nvSpPr>
+        <p:spPr>
+          <a:xfrm>
+            <a:off x="822960" y="2560320"/>
+            <a:ext cx="10515600" cy="1097280"/>
+          </a:xfrm>
+          <a:prstGeom prst="rect">
+            <a:avLst/>
+          </a:prstGeom>
+          <a:noFill/>
+        </p:spPr>
+        <p:txBody>
+          <a:bodyPr wrap="none">
+            <a:spAutoFit/>
+          </a:bodyPr>
+          <a:lstStyle/>
+          <a:p>
+            <a:pPr algn="ctr">
+              <a:defRPr sz="3600" b="1">
+                <a:solidFill>
+                  <a:srgbClr val="FFFFFF"/>
+                </a:solidFill>
+              </a:defRPr>
+            </a:pPr>
+            <a:r>
+              <a:t>Discussion</a:t>
+            </a:r>
+          </a:p>
+        </p:txBody>
+      </p:sp>
+      <p:sp>
+        <p:nvSpPr>
+          <p:cNvPr id="3" name="TextBox 2"/>
+          <p:cNvSpPr txBox="1"/>
+          <p:nvPr/>
+        </p:nvSpPr>
+        <p:spPr>
+          <a:xfrm>
+            <a:off x="822960" y="3566160"/>
+            <a:ext cx="10515600" cy="914400"/>
+          </a:xfrm>
+          <a:prstGeom prst="rect">
+            <a:avLst/>
+          </a:prstGeom>
+          <a:noFill/>
+        </p:spPr>
+        <p:txBody>
+          <a:bodyPr wrap="none">
+            <a:spAutoFit/>
+          </a:bodyPr>
+          <a:lstStyle/>
+          <a:p>
+            <a:pPr algn="ctr">
+              <a:defRPr sz="1800">
+                <a:solidFill>
+                  <a:srgbClr val="FCE7E7"/>
+                </a:solidFill>
+              </a:defRPr>
+            </a:pPr>
+            <a:r>
+              <a:t>Steam Safety Management Program · Texas A&amp;M UES · Reliability &amp; Compliance</a:t>
             </a:r>
           </a:p>
         </p:txBody>
@@ -4253,8 +7087,8 @@
         </p:nvSpPr>
         <p:spPr>
           <a:xfrm>
-            <a:off x="640080" y="365760"/>
-            <a:ext cx="10972800" cy="640080"/>
+            <a:off x="640080" y="347472"/>
+            <a:ext cx="10972800" cy="594360"/>
           </a:xfrm>
           <a:prstGeom prst="rect">
             <a:avLst/>
@@ -4275,7 +7109,7 @@
               </a:defRPr>
             </a:pPr>
             <a:r>
-              <a:t>Data Hierarchy</a:t>
+              <a:t>Why Leadership Should Care</a:t>
             </a:r>
           </a:p>
         </p:txBody>
@@ -4331,8 +7165,8 @@
         </p:nvSpPr>
         <p:spPr>
           <a:xfrm>
-            <a:off x="822960" y="1188720"/>
-            <a:ext cx="10789920" cy="5212080"/>
+            <a:off x="777240" y="1188720"/>
+            <a:ext cx="10881360" cy="5303520"/>
           </a:xfrm>
           <a:prstGeom prst="rect">
             <a:avLst/>
@@ -4347,76 +7181,76 @@
           <a:p>
             <a:pPr>
               <a:spcAft>
-                <a:spcPts val="1000"/>
-              </a:spcAft>
-              <a:defRPr sz="1800">
-                <a:solidFill>
-                  <a:srgbClr val="1E293B"/>
-                </a:solidFill>
-              </a:defRPr>
-            </a:pPr>
-            <a:r>
-              <a:t>Site → Equipment → Location → PSV (serial number)</a:t>
-            </a:r>
-          </a:p>
-          <a:p>
-            <a:pPr>
-              <a:spcAft>
-                <a:spcPts val="1000"/>
-              </a:spcAft>
-              <a:defRPr sz="1800">
-                <a:solidFill>
-                  <a:srgbClr val="1E293B"/>
-                </a:solidFill>
-              </a:defRPr>
-            </a:pPr>
-            <a:r>
-              <a:t>Equipment: boilers, HRSGs, vessels, and other protected assets</a:t>
-            </a:r>
-          </a:p>
-          <a:p>
-            <a:pPr>
-              <a:spcAft>
-                <a:spcPts val="1000"/>
-              </a:spcAft>
-              <a:defRPr sz="1800">
-                <a:solidFill>
-                  <a:srgbClr val="1E293B"/>
-                </a:solidFill>
-              </a:defRPr>
-            </a:pPr>
-            <a:r>
-              <a:t>Location: each relief-valve mounting point on that equipment</a:t>
-            </a:r>
-          </a:p>
-          <a:p>
-            <a:pPr>
-              <a:spcAft>
-                <a:spcPts val="1000"/>
-              </a:spcAft>
-              <a:defRPr sz="1800">
-                <a:solidFill>
-                  <a:srgbClr val="1E293B"/>
-                </a:solidFill>
-              </a:defRPr>
-            </a:pPr>
-            <a:r>
-              <a:t>PSV: serial number, inventory ID, datasheet, status &amp; history</a:t>
-            </a:r>
-          </a:p>
-          <a:p>
-            <a:pPr>
-              <a:spcAft>
-                <a:spcPts val="1000"/>
-              </a:spcAft>
-              <a:defRPr sz="1800">
-                <a:solidFill>
-                  <a:srgbClr val="1E293B"/>
-                </a:solidFill>
-              </a:defRPr>
-            </a:pPr>
-            <a:r>
-              <a:t>Typical location: one installed valve + one spare</a:t>
+                <a:spcPts val="800"/>
+              </a:spcAft>
+              <a:defRPr sz="1700">
+                <a:solidFill>
+                  <a:srgbClr val="1E293B"/>
+                </a:solidFill>
+              </a:defRPr>
+            </a:pPr>
+            <a:r>
+              <a:t>Boiler PSVs are code-required safety devices — missed recertification creates regulatory and operational risk</a:t>
+            </a:r>
+          </a:p>
+          <a:p>
+            <a:pPr>
+              <a:spcAft>
+                <a:spcPts val="800"/>
+              </a:spcAft>
+              <a:defRPr sz="1700">
+                <a:solidFill>
+                  <a:srgbClr val="1E293B"/>
+                </a:solidFill>
+              </a:defRPr>
+            </a:pPr>
+            <a:r>
+              <a:t>Before this work, valve status, spare coverage, and due dates were difficult to see across the fleet</a:t>
+            </a:r>
+          </a:p>
+          <a:p>
+            <a:pPr>
+              <a:spcAft>
+                <a:spcPts val="800"/>
+              </a:spcAft>
+              <a:defRPr sz="1700">
+                <a:solidFill>
+                  <a:srgbClr val="1E293B"/>
+                </a:solidFill>
+              </a:defRPr>
+            </a:pPr>
+            <a:r>
+              <a:t>Unplanned failures and last-minute testing drive cost, outages, and audit exposure</a:t>
+            </a:r>
+          </a:p>
+          <a:p>
+            <a:pPr>
+              <a:spcAft>
+                <a:spcPts val="800"/>
+              </a:spcAft>
+              <a:defRPr sz="1700">
+                <a:solidFill>
+                  <a:srgbClr val="1E293B"/>
+                </a:solidFill>
+              </a:defRPr>
+            </a:pPr>
+            <a:r>
+              <a:t>A structured program reduces surprises, supports TDLR/NBIC expectations, and improves capital planning</a:t>
+            </a:r>
+          </a:p>
+          <a:p>
+            <a:pPr>
+              <a:spcAft>
+                <a:spcPts val="800"/>
+              </a:spcAft>
+              <a:defRPr sz="1700">
+                <a:solidFill>
+                  <a:srgbClr val="1E293B"/>
+                </a:solidFill>
+              </a:defRPr>
+            </a:pPr>
+            <a:r>
+              <a:t>This is reliability work that protects people, equipment, and compliance standing</a:t>
             </a:r>
           </a:p>
         </p:txBody>
@@ -4455,8 +7289,8 @@
         </p:nvSpPr>
         <p:spPr>
           <a:xfrm>
-            <a:off x="640080" y="365760"/>
-            <a:ext cx="10972800" cy="640080"/>
+            <a:off x="640080" y="347472"/>
+            <a:ext cx="10972800" cy="594360"/>
           </a:xfrm>
           <a:prstGeom prst="rect">
             <a:avLst/>
@@ -4477,20 +7311,55 @@
               </a:defRPr>
             </a:pPr>
             <a:r>
-              <a:t>Dashboard — Site Overview</a:t>
-            </a:r>
-          </a:p>
-        </p:txBody>
-      </p:sp>
-      <p:sp>
-        <p:nvSpPr>
-          <p:cNvPr id="3" name="Rectangle 2"/>
+              <a:t>Regulatory &amp; Standards Foundation</a:t>
+            </a:r>
+          </a:p>
+        </p:txBody>
+      </p:sp>
+      <p:sp>
+        <p:nvSpPr>
+          <p:cNvPr id="3" name="TextBox 2"/>
+          <p:cNvSpPr txBox="1"/>
+          <p:nvPr/>
+        </p:nvSpPr>
+        <p:spPr>
+          <a:xfrm>
+            <a:off x="640080" y="868680"/>
+            <a:ext cx="10972800" cy="365760"/>
+          </a:xfrm>
+          <a:prstGeom prst="rect">
+            <a:avLst/>
+          </a:prstGeom>
+          <a:noFill/>
+        </p:spPr>
+        <p:txBody>
+          <a:bodyPr wrap="none">
+            <a:spAutoFit/>
+          </a:bodyPr>
+          <a:lstStyle/>
+          <a:p>
+            <a:pPr>
+              <a:defRPr sz="1300">
+                <a:solidFill>
+                  <a:srgbClr val="64748B"/>
+                </a:solidFill>
+              </a:defRPr>
+            </a:pPr>
+            <a:r>
+              <a:t>Program decisions are code-informed, not ad hoc</a:t>
+            </a:r>
+          </a:p>
+        </p:txBody>
+      </p:sp>
+      <p:sp>
+        <p:nvSpPr>
+          <p:cNvPr id="4" name="Rectangle 3"/>
           <p:cNvSpPr/>
           <p:nvPr/>
         </p:nvSpPr>
         <p:spPr>
           <a:xfrm>
-            <a:off x="640080" y="960120"/>
+            <a:off x="640080" y="1234440"/>
             <a:ext cx="10881360" cy="27432"/>
           </a:xfrm>
           <a:prstGeom prst="rect">
@@ -4525,30 +7394,6 @@
           </a:p>
         </p:txBody>
       </p:sp>
-      <p:pic>
-        <p:nvPicPr>
-          <p:cNvPr id="4" name="Picture 3" descr="01-dashboard.png"/>
-          <p:cNvPicPr>
-            <a:picLocks noChangeAspect="1"/>
-          </p:cNvPicPr>
-          <p:nvPr/>
-        </p:nvPicPr>
-        <p:blipFill>
-          <a:blip r:embed="rId2"/>
-          <a:stretch>
-            <a:fillRect/>
-          </a:stretch>
-        </p:blipFill>
-        <p:spPr>
-          <a:xfrm>
-            <a:off x="640080" y="1143000"/>
-            <a:ext cx="10972800" cy="6858000"/>
-          </a:xfrm>
-          <a:prstGeom prst="rect">
-            <a:avLst/>
-          </a:prstGeom>
-        </p:spPr>
-      </p:pic>
       <p:sp>
         <p:nvSpPr>
           <p:cNvPr id="5" name="TextBox 4"/>
@@ -4557,8 +7402,8 @@
         </p:nvSpPr>
         <p:spPr>
           <a:xfrm>
-            <a:off x="640080" y="6263640"/>
-            <a:ext cx="10972800" cy="411480"/>
+            <a:off x="777240" y="1417320"/>
+            <a:ext cx="10881360" cy="5303520"/>
           </a:xfrm>
           <a:prstGeom prst="rect">
             <a:avLst/>
@@ -4566,20 +7411,83 @@
           <a:noFill/>
         </p:spPr>
         <p:txBody>
-          <a:bodyPr wrap="none">
+          <a:bodyPr wrap="square">
             <a:spAutoFit/>
           </a:bodyPr>
           <a:lstStyle/>
           <a:p>
-            <a:pPr algn="ctr">
-              <a:defRPr sz="1200">
-                <a:solidFill>
-                  <a:srgbClr val="64748B"/>
-                </a:solidFill>
-              </a:defRPr>
-            </a:pPr>
-            <a:r>
-              <a:t>KPI cards (Total, Installed, Out for Service, Overdue, Compliant %), equipment grid, and urgency panel</a:t>
+            <a:pPr>
+              <a:spcAft>
+                <a:spcPts val="800"/>
+              </a:spcAft>
+              <a:defRPr sz="1700">
+                <a:solidFill>
+                  <a:srgbClr val="1E293B"/>
+                </a:solidFill>
+              </a:defRPr>
+            </a:pPr>
+            <a:r>
+              <a:t>ASME Section I — boiler safety valve design, capacity, and manual-lift requirements</a:t>
+            </a:r>
+          </a:p>
+          <a:p>
+            <a:pPr>
+              <a:spcAft>
+                <a:spcPts val="800"/>
+              </a:spcAft>
+              <a:defRPr sz="1700">
+                <a:solidFill>
+                  <a:srgbClr val="1E293B"/>
+                </a:solidFill>
+              </a:defRPr>
+            </a:pPr>
+            <a:r>
+              <a:t>NBIC Part 2 — in-service inspection and maximum 3-year test intervals</a:t>
+            </a:r>
+          </a:p>
+          <a:p>
+            <a:pPr>
+              <a:spcAft>
+                <a:spcPts val="800"/>
+              </a:spcAft>
+              <a:defRPr sz="1700">
+                <a:solidFill>
+                  <a:srgbClr val="1E293B"/>
+                </a:solidFill>
+              </a:defRPr>
+            </a:pPr>
+            <a:r>
+              <a:t>API RP 576 — industry best practice for inspection, testing, and repair of relief devices</a:t>
+            </a:r>
+          </a:p>
+          <a:p>
+            <a:pPr>
+              <a:spcAft>
+                <a:spcPts val="800"/>
+              </a:spcAft>
+              <a:defRPr sz="1700">
+                <a:solidFill>
+                  <a:srgbClr val="1E293B"/>
+                </a:solidFill>
+              </a:defRPr>
+            </a:pPr>
+            <a:r>
+              <a:t>16 TAC Chapter 65 &amp; Texas Health &amp; Safety Code Ch. 755 — state boiler program requirements</a:t>
+            </a:r>
+          </a:p>
+          <a:p>
+            <a:pPr>
+              <a:spcAft>
+                <a:spcPts val="800"/>
+              </a:spcAft>
+              <a:defRPr sz="1700">
+                <a:solidFill>
+                  <a:srgbClr val="1E293B"/>
+                </a:solidFill>
+              </a:defRPr>
+            </a:pPr>
+            <a:r>
+              <a:t>Maintenance Strategy document ties every PM activity back to these references</a:t>
             </a:r>
           </a:p>
         </p:txBody>
@@ -4598,7 +7506,7 @@
     <p:bg>
       <p:bgPr>
         <a:solidFill>
-          <a:srgbClr val="FFFFFF"/>
+          <a:srgbClr val="500000"/>
         </a:solidFill>
         <a:effectLst/>
       </p:bgPr>
@@ -4618,8 +7526,8 @@
         </p:nvSpPr>
         <p:spPr>
           <a:xfrm>
-            <a:off x="640080" y="365760"/>
-            <a:ext cx="10972800" cy="640080"/>
+            <a:off x="822960" y="2560320"/>
+            <a:ext cx="10515600" cy="1097280"/>
           </a:xfrm>
           <a:prstGeom prst="rect">
             <a:avLst/>
@@ -4632,96 +7540,29 @@
           </a:bodyPr>
           <a:lstStyle/>
           <a:p>
-            <a:pPr>
-              <a:defRPr sz="2600" b="1">
-                <a:solidFill>
-                  <a:srgbClr val="500000"/>
-                </a:solidFill>
-              </a:defRPr>
-            </a:pPr>
-            <a:r>
-              <a:t>Clickable KPI Filter</a:t>
-            </a:r>
-          </a:p>
-        </p:txBody>
-      </p:sp>
-      <p:sp>
-        <p:nvSpPr>
-          <p:cNvPr id="3" name="Rectangle 2"/>
-          <p:cNvSpPr/>
-          <p:nvPr/>
-        </p:nvSpPr>
-        <p:spPr>
-          <a:xfrm>
-            <a:off x="640080" y="960120"/>
-            <a:ext cx="10881360" cy="27432"/>
-          </a:xfrm>
-          <a:prstGeom prst="rect">
-            <a:avLst/>
-          </a:prstGeom>
-          <a:solidFill>
-            <a:srgbClr val="B83A3A"/>
-          </a:solidFill>
-          <a:ln>
-            <a:noFill/>
-          </a:ln>
-        </p:spPr>
-        <p:style>
-          <a:lnRef idx="1">
-            <a:schemeClr val="accent1"/>
-          </a:lnRef>
-          <a:fillRef idx="3">
-            <a:schemeClr val="accent1"/>
-          </a:fillRef>
-          <a:effectRef idx="2">
-            <a:schemeClr val="accent1"/>
-          </a:effectRef>
-          <a:fontRef idx="minor">
-            <a:schemeClr val="lt1"/>
-          </a:fontRef>
-        </p:style>
-        <p:txBody>
-          <a:bodyPr rtlCol="0" anchor="ctr"/>
-          <a:lstStyle/>
-          <a:p>
-            <a:pPr algn="ctr"/>
-          </a:p>
-        </p:txBody>
-      </p:sp>
-      <p:pic>
-        <p:nvPicPr>
-          <p:cNvPr id="4" name="Picture 3" descr="02-kpi-modal.png"/>
-          <p:cNvPicPr>
-            <a:picLocks noChangeAspect="1"/>
-          </p:cNvPicPr>
-          <p:nvPr/>
-        </p:nvPicPr>
-        <p:blipFill>
-          <a:blip r:embed="rId2"/>
-          <a:stretch>
-            <a:fillRect/>
-          </a:stretch>
-        </p:blipFill>
-        <p:spPr>
-          <a:xfrm>
-            <a:off x="640080" y="1143000"/>
-            <a:ext cx="10972800" cy="6858000"/>
-          </a:xfrm>
-          <a:prstGeom prst="rect">
-            <a:avLst/>
-          </a:prstGeom>
-        </p:spPr>
-      </p:pic>
-      <p:sp>
-        <p:nvSpPr>
-          <p:cNvPr id="5" name="TextBox 4"/>
+            <a:pPr algn="ctr">
+              <a:defRPr sz="3600" b="1">
+                <a:solidFill>
+                  <a:srgbClr val="FFFFFF"/>
+                </a:solidFill>
+              </a:defRPr>
+            </a:pPr>
+            <a:r>
+              <a:t>Building the Program</a:t>
+            </a:r>
+          </a:p>
+        </p:txBody>
+      </p:sp>
+      <p:sp>
+        <p:nvSpPr>
+          <p:cNvPr id="3" name="TextBox 2"/>
           <p:cNvSpPr txBox="1"/>
           <p:nvPr/>
         </p:nvSpPr>
         <p:spPr>
           <a:xfrm>
-            <a:off x="640080" y="6263640"/>
-            <a:ext cx="10972800" cy="411480"/>
+            <a:off x="822960" y="3566160"/>
+            <a:ext cx="10515600" cy="914400"/>
           </a:xfrm>
           <a:prstGeom prst="rect">
             <a:avLst/>
@@ -4735,14 +7576,14 @@
           <a:lstStyle/>
           <a:p>
             <a:pPr algn="ctr">
-              <a:defRPr sz="1200">
-                <a:solidFill>
-                  <a:srgbClr val="64748B"/>
-                </a:solidFill>
-              </a:defRPr>
-            </a:pPr>
-            <a:r>
-              <a:t>Click any KPI to open a compact list with serial, inventory ID, equipment, location, status, due date, and compliance</a:t>
+              <a:defRPr sz="1800">
+                <a:solidFill>
+                  <a:srgbClr val="FCE7E7"/>
+                </a:solidFill>
+              </a:defRPr>
+            </a:pPr>
+            <a:r>
+              <a:t>Field data → Master register → Dashboard → Maintenance strategy</a:t>
             </a:r>
           </a:p>
         </p:txBody>
@@ -4781,8 +7622,8 @@
         </p:nvSpPr>
         <p:spPr>
           <a:xfrm>
-            <a:off x="640080" y="365760"/>
-            <a:ext cx="10972800" cy="640080"/>
+            <a:off x="640080" y="347472"/>
+            <a:ext cx="10972800" cy="594360"/>
           </a:xfrm>
           <a:prstGeom prst="rect">
             <a:avLst/>
@@ -4803,20 +7644,55 @@
               </a:defRPr>
             </a:pPr>
             <a:r>
-              <a:t>Equipment Page</a:t>
-            </a:r>
-          </a:p>
-        </p:txBody>
-      </p:sp>
-      <p:sp>
-        <p:nvSpPr>
-          <p:cNvPr id="3" name="Rectangle 2"/>
+              <a:t>Program Development Path</a:t>
+            </a:r>
+          </a:p>
+        </p:txBody>
+      </p:sp>
+      <p:sp>
+        <p:nvSpPr>
+          <p:cNvPr id="3" name="TextBox 2"/>
+          <p:cNvSpPr txBox="1"/>
+          <p:nvPr/>
+        </p:nvSpPr>
+        <p:spPr>
+          <a:xfrm>
+            <a:off x="640080" y="868680"/>
+            <a:ext cx="10972800" cy="365760"/>
+          </a:xfrm>
+          <a:prstGeom prst="rect">
+            <a:avLst/>
+          </a:prstGeom>
+          <a:noFill/>
+        </p:spPr>
+        <p:txBody>
+          <a:bodyPr wrap="none">
+            <a:spAutoFit/>
+          </a:bodyPr>
+          <a:lstStyle/>
+          <a:p>
+            <a:pPr>
+              <a:defRPr sz="1300">
+                <a:solidFill>
+                  <a:srgbClr val="64748B"/>
+                </a:solidFill>
+              </a:defRPr>
+            </a:pPr>
+            <a:r>
+              <a:t>From field discovery to a sustainable maintenance program</a:t>
+            </a:r>
+          </a:p>
+        </p:txBody>
+      </p:sp>
+      <p:sp>
+        <p:nvSpPr>
+          <p:cNvPr id="4" name="Rectangle 3"/>
           <p:cNvSpPr/>
           <p:nvPr/>
         </p:nvSpPr>
         <p:spPr>
           <a:xfrm>
-            <a:off x="640080" y="960120"/>
+            <a:off x="640080" y="1234440"/>
             <a:ext cx="10881360" cy="27432"/>
           </a:xfrm>
           <a:prstGeom prst="rect">
@@ -4851,40 +7727,61 @@
           </a:p>
         </p:txBody>
       </p:sp>
-      <p:pic>
-        <p:nvPicPr>
-          <p:cNvPr id="4" name="Picture 3" descr="03-equipment.png"/>
-          <p:cNvPicPr>
-            <a:picLocks noChangeAspect="1"/>
-          </p:cNvPicPr>
-          <p:nvPr/>
-        </p:nvPicPr>
-        <p:blipFill>
-          <a:blip r:embed="rId2"/>
-          <a:stretch>
-            <a:fillRect/>
-          </a:stretch>
-        </p:blipFill>
-        <p:spPr>
-          <a:xfrm>
-            <a:off x="640080" y="1143000"/>
-            <a:ext cx="10972800" cy="6858000"/>
-          </a:xfrm>
-          <a:prstGeom prst="rect">
-            <a:avLst/>
-          </a:prstGeom>
-        </p:spPr>
-      </p:pic>
-      <p:sp>
-        <p:nvSpPr>
-          <p:cNvPr id="5" name="TextBox 4"/>
+      <p:sp>
+        <p:nvSpPr>
+          <p:cNvPr id="5" name="Rectangle 4"/>
+          <p:cNvSpPr/>
+          <p:nvPr/>
+        </p:nvSpPr>
+        <p:spPr>
+          <a:xfrm>
+            <a:off x="502920" y="1417320"/>
+            <a:ext cx="2697480" cy="4389120"/>
+          </a:xfrm>
+          <a:prstGeom prst="rect">
+            <a:avLst/>
+          </a:prstGeom>
+          <a:solidFill>
+            <a:srgbClr val="FDF8F8"/>
+          </a:solidFill>
+          <a:ln>
+            <a:solidFill>
+              <a:srgbClr val="B83A3A"/>
+            </a:solidFill>
+          </a:ln>
+        </p:spPr>
+        <p:style>
+          <a:lnRef idx="1">
+            <a:schemeClr val="accent1"/>
+          </a:lnRef>
+          <a:fillRef idx="3">
+            <a:schemeClr val="accent1"/>
+          </a:fillRef>
+          <a:effectRef idx="2">
+            <a:schemeClr val="accent1"/>
+          </a:effectRef>
+          <a:fontRef idx="minor">
+            <a:schemeClr val="lt1"/>
+          </a:fontRef>
+        </p:style>
+        <p:txBody>
+          <a:bodyPr rtlCol="0" anchor="ctr"/>
+          <a:lstStyle/>
+          <a:p>
+            <a:pPr algn="ctr"/>
+          </a:p>
+        </p:txBody>
+      </p:sp>
+      <p:sp>
+        <p:nvSpPr>
+          <p:cNvPr id="6" name="TextBox 5"/>
           <p:cNvSpPr txBox="1"/>
           <p:nvPr/>
         </p:nvSpPr>
         <p:spPr>
           <a:xfrm>
-            <a:off x="640080" y="6263640"/>
-            <a:ext cx="10972800" cy="411480"/>
+            <a:off x="640080" y="1600200"/>
+            <a:ext cx="502920" cy="411480"/>
           </a:xfrm>
           <a:prstGeom prst="rect">
             <a:avLst/>
@@ -4897,15 +7794,672 @@
           </a:bodyPr>
           <a:lstStyle/>
           <a:p>
-            <a:pPr algn="ctr">
-              <a:defRPr sz="1200">
+            <a:pPr>
+              <a:defRPr sz="2200" b="1">
+                <a:solidFill>
+                  <a:srgbClr val="500000"/>
+                </a:solidFill>
+              </a:defRPr>
+            </a:pPr>
+            <a:r>
+              <a:t>1</a:t>
+            </a:r>
+          </a:p>
+        </p:txBody>
+      </p:sp>
+      <p:sp>
+        <p:nvSpPr>
+          <p:cNvPr id="7" name="TextBox 6"/>
+          <p:cNvSpPr txBox="1"/>
+          <p:nvPr/>
+        </p:nvSpPr>
+        <p:spPr>
+          <a:xfrm>
+            <a:off x="640080" y="2057400"/>
+            <a:ext cx="2423160" cy="1005840"/>
+          </a:xfrm>
+          <a:prstGeom prst="rect">
+            <a:avLst/>
+          </a:prstGeom>
+          <a:noFill/>
+        </p:spPr>
+        <p:txBody>
+          <a:bodyPr wrap="none">
+            <a:spAutoFit/>
+          </a:bodyPr>
+          <a:lstStyle/>
+          <a:p>
+            <a:pPr>
+              <a:defRPr sz="1600" b="1">
+                <a:solidFill>
+                  <a:srgbClr val="1E293B"/>
+                </a:solidFill>
+              </a:defRPr>
+            </a:pPr>
+            <a:r>
+              <a:t>Field Data</a:t>
+            </a:r>
+            <a:br/>
+            <a:r>
+              <a:t>Collection</a:t>
+            </a:r>
+          </a:p>
+        </p:txBody>
+      </p:sp>
+      <p:sp>
+        <p:nvSpPr>
+          <p:cNvPr id="8" name="TextBox 7"/>
+          <p:cNvSpPr txBox="1"/>
+          <p:nvPr/>
+        </p:nvSpPr>
+        <p:spPr>
+          <a:xfrm>
+            <a:off x="640080" y="3154680"/>
+            <a:ext cx="2423160" cy="2286000"/>
+          </a:xfrm>
+          <a:prstGeom prst="rect">
+            <a:avLst/>
+          </a:prstGeom>
+          <a:noFill/>
+        </p:spPr>
+        <p:txBody>
+          <a:bodyPr wrap="none">
+            <a:spAutoFit/>
+          </a:bodyPr>
+          <a:lstStyle/>
+          <a:p>
+            <a:pPr>
+              <a:defRPr sz="1300">
                 <a:solidFill>
                   <a:srgbClr val="64748B"/>
                 </a:solidFill>
               </a:defRPr>
             </a:pPr>
             <a:r>
-              <a:t>Scoped KPIs, location list with inventory ID and installed valve due dates, urgency/history panel</a:t>
+              <a:t>Site walks, nameplate</a:t>
+            </a:r>
+            <a:br/>
+            <a:r>
+              <a:t>photos, valve verification</a:t>
+            </a:r>
+          </a:p>
+        </p:txBody>
+      </p:sp>
+      <p:sp>
+        <p:nvSpPr>
+          <p:cNvPr id="9" name="TextBox 8"/>
+          <p:cNvSpPr txBox="1"/>
+          <p:nvPr/>
+        </p:nvSpPr>
+        <p:spPr>
+          <a:xfrm>
+            <a:off x="3246120" y="3200400"/>
+            <a:ext cx="274320" cy="365760"/>
+          </a:xfrm>
+          <a:prstGeom prst="rect">
+            <a:avLst/>
+          </a:prstGeom>
+          <a:noFill/>
+        </p:spPr>
+        <p:txBody>
+          <a:bodyPr wrap="none">
+            <a:spAutoFit/>
+          </a:bodyPr>
+          <a:lstStyle/>
+          <a:p>
+            <a:pPr>
+              <a:defRPr sz="2200">
+                <a:solidFill>
+                  <a:srgbClr val="B83A3A"/>
+                </a:solidFill>
+              </a:defRPr>
+            </a:pPr>
+            <a:r>
+              <a:t>→</a:t>
+            </a:r>
+          </a:p>
+        </p:txBody>
+      </p:sp>
+      <p:sp>
+        <p:nvSpPr>
+          <p:cNvPr id="10" name="Rectangle 9"/>
+          <p:cNvSpPr/>
+          <p:nvPr/>
+        </p:nvSpPr>
+        <p:spPr>
+          <a:xfrm>
+            <a:off x="3520440" y="1417320"/>
+            <a:ext cx="2697480" cy="4389120"/>
+          </a:xfrm>
+          <a:prstGeom prst="rect">
+            <a:avLst/>
+          </a:prstGeom>
+          <a:solidFill>
+            <a:srgbClr val="FDF8F8"/>
+          </a:solidFill>
+          <a:ln>
+            <a:solidFill>
+              <a:srgbClr val="B83A3A"/>
+            </a:solidFill>
+          </a:ln>
+        </p:spPr>
+        <p:style>
+          <a:lnRef idx="1">
+            <a:schemeClr val="accent1"/>
+          </a:lnRef>
+          <a:fillRef idx="3">
+            <a:schemeClr val="accent1"/>
+          </a:fillRef>
+          <a:effectRef idx="2">
+            <a:schemeClr val="accent1"/>
+          </a:effectRef>
+          <a:fontRef idx="minor">
+            <a:schemeClr val="lt1"/>
+          </a:fontRef>
+        </p:style>
+        <p:txBody>
+          <a:bodyPr rtlCol="0" anchor="ctr"/>
+          <a:lstStyle/>
+          <a:p>
+            <a:pPr algn="ctr"/>
+          </a:p>
+        </p:txBody>
+      </p:sp>
+      <p:sp>
+        <p:nvSpPr>
+          <p:cNvPr id="11" name="TextBox 10"/>
+          <p:cNvSpPr txBox="1"/>
+          <p:nvPr/>
+        </p:nvSpPr>
+        <p:spPr>
+          <a:xfrm>
+            <a:off x="3657600" y="1600200"/>
+            <a:ext cx="502920" cy="411480"/>
+          </a:xfrm>
+          <a:prstGeom prst="rect">
+            <a:avLst/>
+          </a:prstGeom>
+          <a:noFill/>
+        </p:spPr>
+        <p:txBody>
+          <a:bodyPr wrap="none">
+            <a:spAutoFit/>
+          </a:bodyPr>
+          <a:lstStyle/>
+          <a:p>
+            <a:pPr>
+              <a:defRPr sz="2200" b="1">
+                <a:solidFill>
+                  <a:srgbClr val="500000"/>
+                </a:solidFill>
+              </a:defRPr>
+            </a:pPr>
+            <a:r>
+              <a:t>2</a:t>
+            </a:r>
+          </a:p>
+        </p:txBody>
+      </p:sp>
+      <p:sp>
+        <p:nvSpPr>
+          <p:cNvPr id="12" name="TextBox 11"/>
+          <p:cNvSpPr txBox="1"/>
+          <p:nvPr/>
+        </p:nvSpPr>
+        <p:spPr>
+          <a:xfrm>
+            <a:off x="3657600" y="2057400"/>
+            <a:ext cx="2423160" cy="1005840"/>
+          </a:xfrm>
+          <a:prstGeom prst="rect">
+            <a:avLst/>
+          </a:prstGeom>
+          <a:noFill/>
+        </p:spPr>
+        <p:txBody>
+          <a:bodyPr wrap="none">
+            <a:spAutoFit/>
+          </a:bodyPr>
+          <a:lstStyle/>
+          <a:p>
+            <a:pPr>
+              <a:defRPr sz="1600" b="1">
+                <a:solidFill>
+                  <a:srgbClr val="1E293B"/>
+                </a:solidFill>
+              </a:defRPr>
+            </a:pPr>
+            <a:r>
+              <a:t>Master Excel</a:t>
+            </a:r>
+            <a:br/>
+            <a:r>
+              <a:t>Register</a:t>
+            </a:r>
+          </a:p>
+        </p:txBody>
+      </p:sp>
+      <p:sp>
+        <p:nvSpPr>
+          <p:cNvPr id="13" name="TextBox 12"/>
+          <p:cNvSpPr txBox="1"/>
+          <p:nvPr/>
+        </p:nvSpPr>
+        <p:spPr>
+          <a:xfrm>
+            <a:off x="3657600" y="3154680"/>
+            <a:ext cx="2423160" cy="2286000"/>
+          </a:xfrm>
+          <a:prstGeom prst="rect">
+            <a:avLst/>
+          </a:prstGeom>
+          <a:noFill/>
+        </p:spPr>
+        <p:txBody>
+          <a:bodyPr wrap="none">
+            <a:spAutoFit/>
+          </a:bodyPr>
+          <a:lstStyle/>
+          <a:p>
+            <a:pPr>
+              <a:defRPr sz="1300">
+                <a:solidFill>
+                  <a:srgbClr val="64748B"/>
+                </a:solidFill>
+              </a:defRPr>
+            </a:pPr>
+            <a:r>
+              <a:t>Comprehensive master file</a:t>
+            </a:r>
+            <a:br/>
+            <a:r>
+              <a:t>for sorting &amp; analysis</a:t>
+            </a:r>
+          </a:p>
+        </p:txBody>
+      </p:sp>
+      <p:sp>
+        <p:nvSpPr>
+          <p:cNvPr id="14" name="TextBox 13"/>
+          <p:cNvSpPr txBox="1"/>
+          <p:nvPr/>
+        </p:nvSpPr>
+        <p:spPr>
+          <a:xfrm>
+            <a:off x="6263640" y="3200400"/>
+            <a:ext cx="274320" cy="365760"/>
+          </a:xfrm>
+          <a:prstGeom prst="rect">
+            <a:avLst/>
+          </a:prstGeom>
+          <a:noFill/>
+        </p:spPr>
+        <p:txBody>
+          <a:bodyPr wrap="none">
+            <a:spAutoFit/>
+          </a:bodyPr>
+          <a:lstStyle/>
+          <a:p>
+            <a:pPr>
+              <a:defRPr sz="2200">
+                <a:solidFill>
+                  <a:srgbClr val="B83A3A"/>
+                </a:solidFill>
+              </a:defRPr>
+            </a:pPr>
+            <a:r>
+              <a:t>→</a:t>
+            </a:r>
+          </a:p>
+        </p:txBody>
+      </p:sp>
+      <p:sp>
+        <p:nvSpPr>
+          <p:cNvPr id="15" name="Rectangle 14"/>
+          <p:cNvSpPr/>
+          <p:nvPr/>
+        </p:nvSpPr>
+        <p:spPr>
+          <a:xfrm>
+            <a:off x="6537960" y="1417320"/>
+            <a:ext cx="2697480" cy="4389120"/>
+          </a:xfrm>
+          <a:prstGeom prst="rect">
+            <a:avLst/>
+          </a:prstGeom>
+          <a:solidFill>
+            <a:srgbClr val="FDF8F8"/>
+          </a:solidFill>
+          <a:ln>
+            <a:solidFill>
+              <a:srgbClr val="B83A3A"/>
+            </a:solidFill>
+          </a:ln>
+        </p:spPr>
+        <p:style>
+          <a:lnRef idx="1">
+            <a:schemeClr val="accent1"/>
+          </a:lnRef>
+          <a:fillRef idx="3">
+            <a:schemeClr val="accent1"/>
+          </a:fillRef>
+          <a:effectRef idx="2">
+            <a:schemeClr val="accent1"/>
+          </a:effectRef>
+          <a:fontRef idx="minor">
+            <a:schemeClr val="lt1"/>
+          </a:fontRef>
+        </p:style>
+        <p:txBody>
+          <a:bodyPr rtlCol="0" anchor="ctr"/>
+          <a:lstStyle/>
+          <a:p>
+            <a:pPr algn="ctr"/>
+          </a:p>
+        </p:txBody>
+      </p:sp>
+      <p:sp>
+        <p:nvSpPr>
+          <p:cNvPr id="16" name="TextBox 15"/>
+          <p:cNvSpPr txBox="1"/>
+          <p:nvPr/>
+        </p:nvSpPr>
+        <p:spPr>
+          <a:xfrm>
+            <a:off x="6675120" y="1600200"/>
+            <a:ext cx="502920" cy="411480"/>
+          </a:xfrm>
+          <a:prstGeom prst="rect">
+            <a:avLst/>
+          </a:prstGeom>
+          <a:noFill/>
+        </p:spPr>
+        <p:txBody>
+          <a:bodyPr wrap="none">
+            <a:spAutoFit/>
+          </a:bodyPr>
+          <a:lstStyle/>
+          <a:p>
+            <a:pPr>
+              <a:defRPr sz="2200" b="1">
+                <a:solidFill>
+                  <a:srgbClr val="500000"/>
+                </a:solidFill>
+              </a:defRPr>
+            </a:pPr>
+            <a:r>
+              <a:t>3</a:t>
+            </a:r>
+          </a:p>
+        </p:txBody>
+      </p:sp>
+      <p:sp>
+        <p:nvSpPr>
+          <p:cNvPr id="17" name="TextBox 16"/>
+          <p:cNvSpPr txBox="1"/>
+          <p:nvPr/>
+        </p:nvSpPr>
+        <p:spPr>
+          <a:xfrm>
+            <a:off x="6675120" y="2057400"/>
+            <a:ext cx="2423160" cy="1005840"/>
+          </a:xfrm>
+          <a:prstGeom prst="rect">
+            <a:avLst/>
+          </a:prstGeom>
+          <a:noFill/>
+        </p:spPr>
+        <p:txBody>
+          <a:bodyPr wrap="none">
+            <a:spAutoFit/>
+          </a:bodyPr>
+          <a:lstStyle/>
+          <a:p>
+            <a:pPr>
+              <a:defRPr sz="1600" b="1">
+                <a:solidFill>
+                  <a:srgbClr val="1E293B"/>
+                </a:solidFill>
+              </a:defRPr>
+            </a:pPr>
+            <a:r>
+              <a:t>Digital</a:t>
+            </a:r>
+            <a:br/>
+            <a:r>
+              <a:t>Dashboard</a:t>
+            </a:r>
+          </a:p>
+        </p:txBody>
+      </p:sp>
+      <p:sp>
+        <p:nvSpPr>
+          <p:cNvPr id="18" name="TextBox 17"/>
+          <p:cNvSpPr txBox="1"/>
+          <p:nvPr/>
+        </p:nvSpPr>
+        <p:spPr>
+          <a:xfrm>
+            <a:off x="6675120" y="3154680"/>
+            <a:ext cx="2423160" cy="2286000"/>
+          </a:xfrm>
+          <a:prstGeom prst="rect">
+            <a:avLst/>
+          </a:prstGeom>
+          <a:noFill/>
+        </p:spPr>
+        <p:txBody>
+          <a:bodyPr wrap="none">
+            <a:spAutoFit/>
+          </a:bodyPr>
+          <a:lstStyle/>
+          <a:p>
+            <a:pPr>
+              <a:defRPr sz="1300">
+                <a:solidFill>
+                  <a:srgbClr val="64748B"/>
+                </a:solidFill>
+              </a:defRPr>
+            </a:pPr>
+            <a:r>
+              <a:t>Live compliance tracking</a:t>
+            </a:r>
+            <a:br/>
+            <a:r>
+              <a:t>&amp; operational visibility</a:t>
+            </a:r>
+          </a:p>
+        </p:txBody>
+      </p:sp>
+      <p:sp>
+        <p:nvSpPr>
+          <p:cNvPr id="19" name="TextBox 18"/>
+          <p:cNvSpPr txBox="1"/>
+          <p:nvPr/>
+        </p:nvSpPr>
+        <p:spPr>
+          <a:xfrm>
+            <a:off x="9281160" y="3200400"/>
+            <a:ext cx="274320" cy="365760"/>
+          </a:xfrm>
+          <a:prstGeom prst="rect">
+            <a:avLst/>
+          </a:prstGeom>
+          <a:noFill/>
+        </p:spPr>
+        <p:txBody>
+          <a:bodyPr wrap="none">
+            <a:spAutoFit/>
+          </a:bodyPr>
+          <a:lstStyle/>
+          <a:p>
+            <a:pPr>
+              <a:defRPr sz="2200">
+                <a:solidFill>
+                  <a:srgbClr val="B83A3A"/>
+                </a:solidFill>
+              </a:defRPr>
+            </a:pPr>
+            <a:r>
+              <a:t>→</a:t>
+            </a:r>
+          </a:p>
+        </p:txBody>
+      </p:sp>
+      <p:sp>
+        <p:nvSpPr>
+          <p:cNvPr id="20" name="Rectangle 19"/>
+          <p:cNvSpPr/>
+          <p:nvPr/>
+        </p:nvSpPr>
+        <p:spPr>
+          <a:xfrm>
+            <a:off x="9555480" y="1417320"/>
+            <a:ext cx="2697480" cy="4389120"/>
+          </a:xfrm>
+          <a:prstGeom prst="rect">
+            <a:avLst/>
+          </a:prstGeom>
+          <a:solidFill>
+            <a:srgbClr val="FDF8F8"/>
+          </a:solidFill>
+          <a:ln>
+            <a:solidFill>
+              <a:srgbClr val="B83A3A"/>
+            </a:solidFill>
+          </a:ln>
+        </p:spPr>
+        <p:style>
+          <a:lnRef idx="1">
+            <a:schemeClr val="accent1"/>
+          </a:lnRef>
+          <a:fillRef idx="3">
+            <a:schemeClr val="accent1"/>
+          </a:fillRef>
+          <a:effectRef idx="2">
+            <a:schemeClr val="accent1"/>
+          </a:effectRef>
+          <a:fontRef idx="minor">
+            <a:schemeClr val="lt1"/>
+          </a:fontRef>
+        </p:style>
+        <p:txBody>
+          <a:bodyPr rtlCol="0" anchor="ctr"/>
+          <a:lstStyle/>
+          <a:p>
+            <a:pPr algn="ctr"/>
+          </a:p>
+        </p:txBody>
+      </p:sp>
+      <p:sp>
+        <p:nvSpPr>
+          <p:cNvPr id="21" name="TextBox 20"/>
+          <p:cNvSpPr txBox="1"/>
+          <p:nvPr/>
+        </p:nvSpPr>
+        <p:spPr>
+          <a:xfrm>
+            <a:off x="9692640" y="1600200"/>
+            <a:ext cx="502920" cy="411480"/>
+          </a:xfrm>
+          <a:prstGeom prst="rect">
+            <a:avLst/>
+          </a:prstGeom>
+          <a:noFill/>
+        </p:spPr>
+        <p:txBody>
+          <a:bodyPr wrap="none">
+            <a:spAutoFit/>
+          </a:bodyPr>
+          <a:lstStyle/>
+          <a:p>
+            <a:pPr>
+              <a:defRPr sz="2200" b="1">
+                <a:solidFill>
+                  <a:srgbClr val="500000"/>
+                </a:solidFill>
+              </a:defRPr>
+            </a:pPr>
+            <a:r>
+              <a:t>4</a:t>
+            </a:r>
+          </a:p>
+        </p:txBody>
+      </p:sp>
+      <p:sp>
+        <p:nvSpPr>
+          <p:cNvPr id="22" name="TextBox 21"/>
+          <p:cNvSpPr txBox="1"/>
+          <p:nvPr/>
+        </p:nvSpPr>
+        <p:spPr>
+          <a:xfrm>
+            <a:off x="9692640" y="2057400"/>
+            <a:ext cx="2423160" cy="1005840"/>
+          </a:xfrm>
+          <a:prstGeom prst="rect">
+            <a:avLst/>
+          </a:prstGeom>
+          <a:noFill/>
+        </p:spPr>
+        <p:txBody>
+          <a:bodyPr wrap="none">
+            <a:spAutoFit/>
+          </a:bodyPr>
+          <a:lstStyle/>
+          <a:p>
+            <a:pPr>
+              <a:defRPr sz="1600" b="1">
+                <a:solidFill>
+                  <a:srgbClr val="1E293B"/>
+                </a:solidFill>
+              </a:defRPr>
+            </a:pPr>
+            <a:r>
+              <a:t>Maintenance</a:t>
+            </a:r>
+            <a:br/>
+            <a:r>
+              <a:t>Strategy</a:t>
+            </a:r>
+          </a:p>
+        </p:txBody>
+      </p:sp>
+      <p:sp>
+        <p:nvSpPr>
+          <p:cNvPr id="23" name="TextBox 22"/>
+          <p:cNvSpPr txBox="1"/>
+          <p:nvPr/>
+        </p:nvSpPr>
+        <p:spPr>
+          <a:xfrm>
+            <a:off x="9692640" y="3154680"/>
+            <a:ext cx="2423160" cy="2286000"/>
+          </a:xfrm>
+          <a:prstGeom prst="rect">
+            <a:avLst/>
+          </a:prstGeom>
+          <a:noFill/>
+        </p:spPr>
+        <p:txBody>
+          <a:bodyPr wrap="none">
+            <a:spAutoFit/>
+          </a:bodyPr>
+          <a:lstStyle/>
+          <a:p>
+            <a:pPr>
+              <a:defRPr sz="1300">
+                <a:solidFill>
+                  <a:srgbClr val="64748B"/>
+                </a:solidFill>
+              </a:defRPr>
+            </a:pPr>
+            <a:r>
+              <a:t>Code-based PM program</a:t>
+            </a:r>
+            <a:br/>
+            <a:r>
+              <a:t>&amp; spare-pool planning</a:t>
             </a:r>
           </a:p>
         </p:txBody>
@@ -4944,8 +8498,8 @@
         </p:nvSpPr>
         <p:spPr>
           <a:xfrm>
-            <a:off x="640080" y="365760"/>
-            <a:ext cx="10972800" cy="640080"/>
+            <a:off x="640080" y="347472"/>
+            <a:ext cx="10972800" cy="594360"/>
           </a:xfrm>
           <a:prstGeom prst="rect">
             <a:avLst/>
@@ -4966,20 +8520,55 @@
               </a:defRPr>
             </a:pPr>
             <a:r>
-              <a:t>Location Page</a:t>
-            </a:r>
-          </a:p>
-        </p:txBody>
-      </p:sp>
-      <p:sp>
-        <p:nvSpPr>
-          <p:cNvPr id="3" name="Rectangle 2"/>
+              <a:t>Phase 1 — Field Data Collection</a:t>
+            </a:r>
+          </a:p>
+        </p:txBody>
+      </p:sp>
+      <p:sp>
+        <p:nvSpPr>
+          <p:cNvPr id="3" name="TextBox 2"/>
+          <p:cNvSpPr txBox="1"/>
+          <p:nvPr/>
+        </p:nvSpPr>
+        <p:spPr>
+          <a:xfrm>
+            <a:off x="640080" y="868680"/>
+            <a:ext cx="10972800" cy="365760"/>
+          </a:xfrm>
+          <a:prstGeom prst="rect">
+            <a:avLst/>
+          </a:prstGeom>
+          <a:noFill/>
+        </p:spPr>
+        <p:txBody>
+          <a:bodyPr wrap="none">
+            <a:spAutoFit/>
+          </a:bodyPr>
+          <a:lstStyle/>
+          <a:p>
+            <a:pPr>
+              <a:defRPr sz="1300">
+                <a:solidFill>
+                  <a:srgbClr val="64748B"/>
+                </a:solidFill>
+              </a:defRPr>
+            </a:pPr>
+            <a:r>
+              <a:t>Ground truth before any database or dashboard</a:t>
+            </a:r>
+          </a:p>
+        </p:txBody>
+      </p:sp>
+      <p:sp>
+        <p:nvSpPr>
+          <p:cNvPr id="4" name="Rectangle 3"/>
           <p:cNvSpPr/>
           <p:nvPr/>
         </p:nvSpPr>
         <p:spPr>
           <a:xfrm>
-            <a:off x="640080" y="960120"/>
+            <a:off x="640080" y="1234440"/>
             <a:ext cx="10881360" cy="27432"/>
           </a:xfrm>
           <a:prstGeom prst="rect">
@@ -5014,30 +8603,6 @@
           </a:p>
         </p:txBody>
       </p:sp>
-      <p:pic>
-        <p:nvPicPr>
-          <p:cNvPr id="4" name="Picture 3" descr="04-location.png"/>
-          <p:cNvPicPr>
-            <a:picLocks noChangeAspect="1"/>
-          </p:cNvPicPr>
-          <p:nvPr/>
-        </p:nvPicPr>
-        <p:blipFill>
-          <a:blip r:embed="rId2"/>
-          <a:stretch>
-            <a:fillRect/>
-          </a:stretch>
-        </p:blipFill>
-        <p:spPr>
-          <a:xfrm>
-            <a:off x="640080" y="1143000"/>
-            <a:ext cx="10972800" cy="6858000"/>
-          </a:xfrm>
-          <a:prstGeom prst="rect">
-            <a:avLst/>
-          </a:prstGeom>
-        </p:spPr>
-      </p:pic>
       <p:sp>
         <p:nvSpPr>
           <p:cNvPr id="5" name="TextBox 4"/>
@@ -5046,8 +8611,8 @@
         </p:nvSpPr>
         <p:spPr>
           <a:xfrm>
-            <a:off x="640080" y="6263640"/>
-            <a:ext cx="10972800" cy="411480"/>
+            <a:off x="777240" y="1417320"/>
+            <a:ext cx="10881360" cy="5303520"/>
           </a:xfrm>
           <a:prstGeom prst="rect">
             <a:avLst/>
@@ -5055,20 +8620,83 @@
           <a:noFill/>
         </p:spPr>
         <p:txBody>
-          <a:bodyPr wrap="none">
+          <a:bodyPr wrap="square">
             <a:spAutoFit/>
           </a:bodyPr>
           <a:lstStyle/>
           <a:p>
-            <a:pPr algn="ctr">
-              <a:defRPr sz="1200">
-                <a:solidFill>
-                  <a:srgbClr val="64748B"/>
-                </a:solidFill>
-              </a:defRPr>
-            </a:pPr>
-            <a:r>
-              <a:t>PSV faceplates for installed valve and spare with quick status controls</a:t>
+            <a:pPr>
+              <a:spcAft>
+                <a:spcPts val="800"/>
+              </a:spcAft>
+              <a:defRPr sz="1700">
+                <a:solidFill>
+                  <a:srgbClr val="1E293B"/>
+                </a:solidFill>
+              </a:defRPr>
+            </a:pPr>
+            <a:r>
+              <a:t>Walked boiler rooms and steam systems to locate every relief valve and protected point</a:t>
+            </a:r>
+          </a:p>
+          <a:p>
+            <a:pPr>
+              <a:spcAft>
+                <a:spcPts val="800"/>
+              </a:spcAft>
+              <a:defRPr sz="1700">
+                <a:solidFill>
+                  <a:srgbClr val="1E293B"/>
+                </a:solidFill>
+              </a:defRPr>
+            </a:pPr>
+            <a:r>
+              <a:t>Captured nameplate photos: serial number, set pressure (CDTP), orifice, manufacturer, NB number</a:t>
+            </a:r>
+          </a:p>
+          <a:p>
+            <a:pPr>
+              <a:spcAft>
+                <a:spcPts val="800"/>
+              </a:spcAft>
+              <a:defRPr sz="1700">
+                <a:solidFill>
+                  <a:srgbClr val="1E293B"/>
+                </a:solidFill>
+              </a:defRPr>
+            </a:pPr>
+            <a:r>
+              <a:t>Verified what was actually installed vs. what drawings or records showed</a:t>
+            </a:r>
+          </a:p>
+          <a:p>
+            <a:pPr>
+              <a:spcAft>
+                <a:spcPts val="800"/>
+              </a:spcAft>
+              <a:defRPr sz="1700">
+                <a:solidFill>
+                  <a:srgbClr val="1E293B"/>
+                </a:solidFill>
+              </a:defRPr>
+            </a:pPr>
+            <a:r>
+              <a:t>Documented whether a spare existed, valve orientation, discharge path, and visible condition issues</a:t>
+            </a:r>
+          </a:p>
+          <a:p>
+            <a:pPr>
+              <a:spcAft>
+                <a:spcPts val="800"/>
+              </a:spcAft>
+              <a:defRPr sz="1700">
+                <a:solidFill>
+                  <a:srgbClr val="1E293B"/>
+                </a:solidFill>
+              </a:defRPr>
+            </a:pPr>
+            <a:r>
+              <a:t>Flagged gaps: missing spares, illegible nameplates, weeping seats, isolation concerns</a:t>
             </a:r>
           </a:p>
         </p:txBody>
@@ -5107,8 +8735,8 @@
         </p:nvSpPr>
         <p:spPr>
           <a:xfrm>
-            <a:off x="640080" y="365760"/>
-            <a:ext cx="10972800" cy="640080"/>
+            <a:off x="640080" y="347472"/>
+            <a:ext cx="10972800" cy="594360"/>
           </a:xfrm>
           <a:prstGeom prst="rect">
             <a:avLst/>
@@ -5129,7 +8757,7 @@
               </a:defRPr>
             </a:pPr>
             <a:r>
-              <a:t>PSV Detail Page</a:t>
+              <a:t>What We Captured in the Field</a:t>
             </a:r>
           </a:p>
         </p:txBody>
@@ -5177,40 +8805,16 @@
           </a:p>
         </p:txBody>
       </p:sp>
-      <p:pic>
-        <p:nvPicPr>
-          <p:cNvPr id="4" name="Picture 3" descr="05-psv-detail.png"/>
-          <p:cNvPicPr>
-            <a:picLocks noChangeAspect="1"/>
-          </p:cNvPicPr>
-          <p:nvPr/>
-        </p:nvPicPr>
-        <p:blipFill>
-          <a:blip r:embed="rId2"/>
-          <a:stretch>
-            <a:fillRect/>
-          </a:stretch>
-        </p:blipFill>
-        <p:spPr>
-          <a:xfrm>
-            <a:off x="640080" y="1143000"/>
-            <a:ext cx="10972800" cy="6858000"/>
-          </a:xfrm>
-          <a:prstGeom prst="rect">
-            <a:avLst/>
-          </a:prstGeom>
-        </p:spPr>
-      </p:pic>
-      <p:sp>
-        <p:nvSpPr>
-          <p:cNvPr id="5" name="TextBox 4"/>
+      <p:sp>
+        <p:nvSpPr>
+          <p:cNvPr id="4" name="TextBox 3"/>
           <p:cNvSpPr txBox="1"/>
           <p:nvPr/>
         </p:nvSpPr>
         <p:spPr>
           <a:xfrm>
-            <a:off x="640080" y="6263640"/>
-            <a:ext cx="10972800" cy="411480"/>
+            <a:off x="640080" y="1234440"/>
+            <a:ext cx="5303520" cy="320040"/>
           </a:xfrm>
           <a:prstGeom prst="rect">
             <a:avLst/>
@@ -5223,15 +8827,231 @@
           </a:bodyPr>
           <a:lstStyle/>
           <a:p>
-            <a:pPr algn="ctr">
-              <a:defRPr sz="1200">
-                <a:solidFill>
-                  <a:srgbClr val="64748B"/>
-                </a:solidFill>
-              </a:defRPr>
-            </a:pPr>
-            <a:r>
-              <a:t>Datasheet, inventory ID, compliance facts, side-by-side status history and repair/overhaul history</a:t>
+            <a:pPr>
+              <a:defRPr sz="1400" b="1">
+                <a:solidFill>
+                  <a:srgbClr val="500000"/>
+                </a:solidFill>
+              </a:defRPr>
+            </a:pPr>
+            <a:r>
+              <a:t>Equipment &amp; location context</a:t>
+            </a:r>
+          </a:p>
+        </p:txBody>
+      </p:sp>
+      <p:sp>
+        <p:nvSpPr>
+          <p:cNvPr id="5" name="TextBox 4"/>
+          <p:cNvSpPr txBox="1"/>
+          <p:nvPr/>
+        </p:nvSpPr>
+        <p:spPr>
+          <a:xfrm>
+            <a:off x="640080" y="1554480"/>
+            <a:ext cx="5394960" cy="4754880"/>
+          </a:xfrm>
+          <a:prstGeom prst="rect">
+            <a:avLst/>
+          </a:prstGeom>
+          <a:noFill/>
+        </p:spPr>
+        <p:txBody>
+          <a:bodyPr wrap="square">
+            <a:spAutoFit/>
+          </a:bodyPr>
+          <a:lstStyle/>
+          <a:p>
+            <a:pPr>
+              <a:spcAft>
+                <a:spcPts val="600"/>
+              </a:spcAft>
+              <a:defRPr sz="1500">
+                <a:solidFill>
+                  <a:srgbClr val="1E293B"/>
+                </a:solidFill>
+              </a:defRPr>
+            </a:pPr>
+            <a:r>
+              <a:t>Boiler / HRSG / commercial unit identity</a:t>
+            </a:r>
+          </a:p>
+          <a:p>
+            <a:pPr>
+              <a:spcAft>
+                <a:spcPts val="600"/>
+              </a:spcAft>
+              <a:defRPr sz="1500">
+                <a:solidFill>
+                  <a:srgbClr val="1E293B"/>
+                </a:solidFill>
+              </a:defRPr>
+            </a:pPr>
+            <a:r>
+              <a:t>Protected location (steam drum, economizer, etc.)</a:t>
+            </a:r>
+          </a:p>
+          <a:p>
+            <a:pPr>
+              <a:spcAft>
+                <a:spcPts val="600"/>
+              </a:spcAft>
+              <a:defRPr sz="1500">
+                <a:solidFill>
+                  <a:srgbClr val="1E293B"/>
+                </a:solidFill>
+              </a:defRPr>
+            </a:pPr>
+            <a:r>
+              <a:t>Position on the system</a:t>
+            </a:r>
+          </a:p>
+          <a:p>
+            <a:pPr>
+              <a:spcAft>
+                <a:spcPts val="600"/>
+              </a:spcAft>
+              <a:defRPr sz="1500">
+                <a:solidFill>
+                  <a:srgbClr val="1E293B"/>
+                </a:solidFill>
+              </a:defRPr>
+            </a:pPr>
+            <a:r>
+              <a:t>Installed vs. spare status</a:t>
+            </a:r>
+          </a:p>
+        </p:txBody>
+      </p:sp>
+      <p:sp>
+        <p:nvSpPr>
+          <p:cNvPr id="6" name="TextBox 5"/>
+          <p:cNvSpPr txBox="1"/>
+          <p:nvPr/>
+        </p:nvSpPr>
+        <p:spPr>
+          <a:xfrm>
+            <a:off x="6172200" y="1234440"/>
+            <a:ext cx="5303520" cy="320040"/>
+          </a:xfrm>
+          <a:prstGeom prst="rect">
+            <a:avLst/>
+          </a:prstGeom>
+          <a:noFill/>
+        </p:spPr>
+        <p:txBody>
+          <a:bodyPr wrap="none">
+            <a:spAutoFit/>
+          </a:bodyPr>
+          <a:lstStyle/>
+          <a:p>
+            <a:pPr>
+              <a:defRPr sz="1400" b="1">
+                <a:solidFill>
+                  <a:srgbClr val="500000"/>
+                </a:solidFill>
+              </a:defRPr>
+            </a:pPr>
+            <a:r>
+              <a:t>Valve identity &amp; condition</a:t>
+            </a:r>
+          </a:p>
+        </p:txBody>
+      </p:sp>
+      <p:sp>
+        <p:nvSpPr>
+          <p:cNvPr id="7" name="TextBox 6"/>
+          <p:cNvSpPr txBox="1"/>
+          <p:nvPr/>
+        </p:nvSpPr>
+        <p:spPr>
+          <a:xfrm>
+            <a:off x="6172200" y="1554480"/>
+            <a:ext cx="5394960" cy="4754880"/>
+          </a:xfrm>
+          <a:prstGeom prst="rect">
+            <a:avLst/>
+          </a:prstGeom>
+          <a:noFill/>
+        </p:spPr>
+        <p:txBody>
+          <a:bodyPr wrap="square">
+            <a:spAutoFit/>
+          </a:bodyPr>
+          <a:lstStyle/>
+          <a:p>
+            <a:pPr>
+              <a:spcAft>
+                <a:spcPts val="600"/>
+              </a:spcAft>
+              <a:defRPr sz="1500">
+                <a:solidFill>
+                  <a:srgbClr val="1E293B"/>
+                </a:solidFill>
+              </a:defRPr>
+            </a:pPr>
+            <a:r>
+              <a:t>Serial number &amp; manufacturer</a:t>
+            </a:r>
+          </a:p>
+          <a:p>
+            <a:pPr>
+              <a:spcAft>
+                <a:spcPts val="600"/>
+              </a:spcAft>
+              <a:defRPr sz="1500">
+                <a:solidFill>
+                  <a:srgbClr val="1E293B"/>
+                </a:solidFill>
+              </a:defRPr>
+            </a:pPr>
+            <a:r>
+              <a:t>Set pressure and capacity</a:t>
+            </a:r>
+          </a:p>
+          <a:p>
+            <a:pPr>
+              <a:spcAft>
+                <a:spcPts val="600"/>
+              </a:spcAft>
+              <a:defRPr sz="1500">
+                <a:solidFill>
+                  <a:srgbClr val="1E293B"/>
+                </a:solidFill>
+              </a:defRPr>
+            </a:pPr>
+            <a:r>
+              <a:t>National Board number</a:t>
+            </a:r>
+          </a:p>
+          <a:p>
+            <a:pPr>
+              <a:spcAft>
+                <a:spcPts val="600"/>
+              </a:spcAft>
+              <a:defRPr sz="1500">
+                <a:solidFill>
+                  <a:srgbClr val="1E293B"/>
+                </a:solidFill>
+              </a:defRPr>
+            </a:pPr>
+            <a:r>
+              <a:t>Nameplate photo evidence</a:t>
+            </a:r>
+          </a:p>
+          <a:p>
+            <a:pPr>
+              <a:spcAft>
+                <a:spcPts val="600"/>
+              </a:spcAft>
+              <a:defRPr sz="1500">
+                <a:solidFill>
+                  <a:srgbClr val="1E293B"/>
+                </a:solidFill>
+              </a:defRPr>
+            </a:pPr>
+            <a:r>
+              <a:t>Visible leakage, corrosion, or damage</a:t>
             </a:r>
           </a:p>
         </p:txBody>
@@ -5270,8 +9090,8 @@
         </p:nvSpPr>
         <p:spPr>
           <a:xfrm>
-            <a:off x="640080" y="365760"/>
-            <a:ext cx="10972800" cy="640080"/>
+            <a:off x="640080" y="347472"/>
+            <a:ext cx="10972800" cy="594360"/>
           </a:xfrm>
           <a:prstGeom prst="rect">
             <a:avLst/>
@@ -5292,20 +9112,55 @@
               </a:defRPr>
             </a:pPr>
             <a:r>
-              <a:t>Compliance Rules</a:t>
-            </a:r>
-          </a:p>
-        </p:txBody>
-      </p:sp>
-      <p:sp>
-        <p:nvSpPr>
-          <p:cNvPr id="3" name="Rectangle 2"/>
+              <a:t>Phase 2 — Master Excel Register</a:t>
+            </a:r>
+          </a:p>
+        </p:txBody>
+      </p:sp>
+      <p:sp>
+        <p:nvSpPr>
+          <p:cNvPr id="3" name="TextBox 2"/>
+          <p:cNvSpPr txBox="1"/>
+          <p:nvPr/>
+        </p:nvSpPr>
+        <p:spPr>
+          <a:xfrm>
+            <a:off x="640080" y="868680"/>
+            <a:ext cx="10972800" cy="365760"/>
+          </a:xfrm>
+          <a:prstGeom prst="rect">
+            <a:avLst/>
+          </a:prstGeom>
+          <a:noFill/>
+        </p:spPr>
+        <p:txBody>
+          <a:bodyPr wrap="none">
+            <a:spAutoFit/>
+          </a:bodyPr>
+          <a:lstStyle/>
+          <a:p>
+            <a:pPr>
+              <a:defRPr sz="1300">
+                <a:solidFill>
+                  <a:srgbClr val="64748B"/>
+                </a:solidFill>
+              </a:defRPr>
+            </a:pPr>
+            <a:r>
+              <a:t>The bridge between field discovery and digital management</a:t>
+            </a:r>
+          </a:p>
+        </p:txBody>
+      </p:sp>
+      <p:sp>
+        <p:nvSpPr>
+          <p:cNvPr id="4" name="Rectangle 3"/>
           <p:cNvSpPr/>
           <p:nvPr/>
         </p:nvSpPr>
         <p:spPr>
           <a:xfrm>
-            <a:off x="640080" y="960120"/>
+            <a:off x="640080" y="1234440"/>
             <a:ext cx="10881360" cy="27432"/>
           </a:xfrm>
           <a:prstGeom prst="rect">
@@ -5342,14 +9197,14 @@
       </p:sp>
       <p:sp>
         <p:nvSpPr>
-          <p:cNvPr id="4" name="TextBox 3"/>
+          <p:cNvPr id="5" name="TextBox 4"/>
           <p:cNvSpPr txBox="1"/>
           <p:nvPr/>
         </p:nvSpPr>
         <p:spPr>
           <a:xfrm>
-            <a:off x="822960" y="1188720"/>
-            <a:ext cx="10789920" cy="5212080"/>
+            <a:off x="777240" y="1417320"/>
+            <a:ext cx="10881360" cy="5303520"/>
           </a:xfrm>
           <a:prstGeom prst="rect">
             <a:avLst/>
@@ -5364,76 +9219,91 @@
           <a:p>
             <a:pPr>
               <a:spcAft>
-                <a:spcPts val="1000"/>
-              </a:spcAft>
-              <a:defRPr sz="1800">
-                <a:solidFill>
-                  <a:srgbClr val="1E293B"/>
-                </a:solidFill>
-              </a:defRPr>
-            </a:pPr>
-            <a:r>
-              <a:t>Due date = last install date + 3 years (or last on-site service for no-spare valves)</a:t>
-            </a:r>
-          </a:p>
-          <a:p>
-            <a:pPr>
-              <a:spcAft>
-                <a:spcPts val="1000"/>
-              </a:spcAft>
-              <a:defRPr sz="1800">
-                <a:solidFill>
-                  <a:srgbClr val="1E293B"/>
-                </a:solidFill>
-              </a:defRPr>
-            </a:pPr>
-            <a:r>
-              <a:t>Due Soon: within 90 days of recert due date</a:t>
-            </a:r>
-          </a:p>
-          <a:p>
-            <a:pPr>
-              <a:spcAft>
-                <a:spcPts val="1000"/>
-              </a:spcAft>
-              <a:defRPr sz="1800">
-                <a:solidFill>
-                  <a:srgbClr val="1E293B"/>
-                </a:solidFill>
-              </a:defRPr>
-            </a:pPr>
-            <a:r>
-              <a:t>Overdue: past the due date</a:t>
-            </a:r>
-          </a:p>
-          <a:p>
-            <a:pPr>
-              <a:spcAft>
-                <a:spcPts val="1000"/>
-              </a:spcAft>
-              <a:defRPr sz="1800">
-                <a:solidFill>
-                  <a:srgbClr val="1E293B"/>
-                </a:solidFill>
-              </a:defRPr>
-            </a:pPr>
-            <a:r>
-              <a:t>Compliant % = (compliant + due soon) ÷ monitored installed valves</a:t>
-            </a:r>
-          </a:p>
-          <a:p>
-            <a:pPr>
-              <a:spcAft>
-                <a:spcPts val="1000"/>
-              </a:spcAft>
-              <a:defRPr sz="1800">
-                <a:solidFill>
-                  <a:srgbClr val="1E293B"/>
-                </a:solidFill>
-              </a:defRPr>
-            </a:pPr>
-            <a:r>
-              <a:t>Inventory / out-for-service spares excluded until installed</a:t>
+                <a:spcPts val="800"/>
+              </a:spcAft>
+              <a:defRPr sz="1700">
+                <a:solidFill>
+                  <a:srgbClr val="1E293B"/>
+                </a:solidFill>
+              </a:defRPr>
+            </a:pPr>
+            <a:r>
+              <a:t>Built a comprehensive Excel master file as the first system of record</a:t>
+            </a:r>
+          </a:p>
+          <a:p>
+            <a:pPr>
+              <a:spcAft>
+                <a:spcPts val="800"/>
+              </a:spcAft>
+              <a:defRPr sz="1700">
+                <a:solidFill>
+                  <a:srgbClr val="1E293B"/>
+                </a:solidFill>
+              </a:defRPr>
+            </a:pPr>
+            <a:r>
+              <a:t>Sorted and normalized field data across equipment, locations, and serial numbers</a:t>
+            </a:r>
+          </a:p>
+          <a:p>
+            <a:pPr>
+              <a:spcAft>
+                <a:spcPts val="800"/>
+              </a:spcAft>
+              <a:defRPr sz="1700">
+                <a:solidFill>
+                  <a:srgbClr val="1E293B"/>
+                </a:solidFill>
+              </a:defRPr>
+            </a:pPr>
+            <a:r>
+              <a:t>Tracked install dates, service history, spare availability, and recert due dates</a:t>
+            </a:r>
+          </a:p>
+          <a:p>
+            <a:pPr>
+              <a:spcAft>
+                <a:spcPts val="800"/>
+              </a:spcAft>
+              <a:defRPr sz="1700">
+                <a:solidFill>
+                  <a:srgbClr val="1E293B"/>
+                </a:solidFill>
+              </a:defRPr>
+            </a:pPr>
+            <a:r>
+              <a:t>Assigned Inventory IDs and position-oriented tags for procurement and CMMS use</a:t>
+            </a:r>
+          </a:p>
+          <a:p>
+            <a:pPr>
+              <a:spcAft>
+                <a:spcPts val="800"/>
+              </a:spcAft>
+              <a:defRPr sz="1700">
+                <a:solidFill>
+                  <a:srgbClr val="1E293B"/>
+                </a:solidFill>
+              </a:defRPr>
+            </a:pPr>
+            <a:r>
+              <a:t>Used Excel to validate completeness before investing in a digital platform</a:t>
+            </a:r>
+          </a:p>
+          <a:p>
+            <a:pPr>
+              <a:spcAft>
+                <a:spcPts val="800"/>
+              </a:spcAft>
+              <a:defRPr sz="1700">
+                <a:solidFill>
+                  <a:srgbClr val="1E293B"/>
+                </a:solidFill>
+              </a:defRPr>
+            </a:pPr>
+            <a:r>
+              <a:t>Master file still supports bulk reporting and leadership reviews</a:t>
             </a:r>
           </a:p>
         </p:txBody>
